--- a/Nhom_5_WEB.pptx
+++ b/Nhom_5_WEB.pptx
@@ -5,16 +5,16 @@
     <p:sldMasterId id="2147483648" r:id="rId1"/>
   </p:sldMasterIdLst>
   <p:notesMasterIdLst>
-    <p:notesMasterId r:id="rId4"/>
+    <p:notesMasterId r:id="rId9"/>
   </p:notesMasterIdLst>
   <p:sldIdLst>
-    <p:sldId id="256" r:id="rId3"/>
-    <p:sldId id="285" r:id="rId5"/>
-    <p:sldId id="257" r:id="rId6"/>
-    <p:sldId id="287" r:id="rId7"/>
-    <p:sldId id="288" r:id="rId8"/>
-    <p:sldId id="289" r:id="rId9"/>
-    <p:sldId id="290" r:id="rId10"/>
+    <p:sldId id="256" r:id="rId2"/>
+    <p:sldId id="285" r:id="rId3"/>
+    <p:sldId id="257" r:id="rId4"/>
+    <p:sldId id="287" r:id="rId5"/>
+    <p:sldId id="288" r:id="rId6"/>
+    <p:sldId id="289" r:id="rId7"/>
+    <p:sldId id="290" r:id="rId8"/>
   </p:sldIdLst>
   <p:sldSz cx="9144000" cy="5143500" type="screen16x9"/>
   <p:notesSz cx="6858000" cy="9144000"/>
@@ -116,7 +116,7 @@
   <p:extLst>
     <p:ext uri="{EFAFB233-063F-42B5-8137-9DF3F51BA10A}">
       <p15:sldGuideLst xmlns:p15="http://schemas.microsoft.com/office/powerpoint/2012/main">
-        <p15:guide id="1" orient="horz" pos="1619" userDrawn="1">
+        <p15:guide id="1" orient="horz" pos="1620" userDrawn="1">
           <p15:clr>
             <a:srgbClr val="747775"/>
           </p15:clr>
@@ -130,6 +130,261 @@
     </p:ext>
   </p:extLst>
 </p:presentation>
+</file>
+
+<file path=ppt/changesInfos/changesInfo1.xml><?xml version="1.0" encoding="utf-8"?>
+<pc:chgInfo xmlns:a="http://schemas.openxmlformats.org/drawingml/2006/main" xmlns:r="http://schemas.openxmlformats.org/officeDocument/2006/relationships" xmlns:ac="http://schemas.microsoft.com/office/drawing/2013/main/command" xmlns:pc="http://schemas.microsoft.com/office/powerpoint/2013/main/command">
+  <pc:docChgLst>
+    <pc:chgData name="Quang Hao" userId="43c94eade7a1fba8" providerId="LiveId" clId="{29A7A66F-1FFE-40D6-BD48-BC753ABCF831}"/>
+    <pc:docChg chg="custSel modSld">
+      <pc:chgData name="Quang Hao" userId="43c94eade7a1fba8" providerId="LiveId" clId="{29A7A66F-1FFE-40D6-BD48-BC753ABCF831}" dt="2026-05-12T04:11:30.168" v="1" actId="26606"/>
+      <pc:docMkLst>
+        <pc:docMk/>
+      </pc:docMkLst>
+      <pc:sldChg chg="modSp mod">
+        <pc:chgData name="Quang Hao" userId="43c94eade7a1fba8" providerId="LiveId" clId="{29A7A66F-1FFE-40D6-BD48-BC753ABCF831}" dt="2026-05-12T04:11:30.168" v="1" actId="26606"/>
+        <pc:sldMkLst>
+          <pc:docMk/>
+          <pc:sldMk cId="0" sldId="256"/>
+        </pc:sldMkLst>
+        <pc:spChg chg="mod">
+          <ac:chgData name="Quang Hao" userId="43c94eade7a1fba8" providerId="LiveId" clId="{29A7A66F-1FFE-40D6-BD48-BC753ABCF831}" dt="2026-05-12T04:11:30.168" v="1" actId="26606"/>
+          <ac:spMkLst>
+            <pc:docMk/>
+            <pc:sldMk cId="0" sldId="256"/>
+            <ac:spMk id="6" creationId="{00000000-0000-0000-0000-000000000000}"/>
+          </ac:spMkLst>
+        </pc:spChg>
+        <pc:grpChg chg="add mod">
+          <ac:chgData name="Quang Hao" userId="43c94eade7a1fba8" providerId="LiveId" clId="{29A7A66F-1FFE-40D6-BD48-BC753ABCF831}" dt="2026-05-12T04:11:30.168" v="1" actId="26606"/>
+          <ac:grpSpMkLst>
+            <pc:docMk/>
+            <pc:sldMk cId="0" sldId="256"/>
+            <ac:grpSpMk id="5" creationId="{00000000-0000-0000-0000-000000000000}"/>
+          </ac:grpSpMkLst>
+        </pc:grpChg>
+      </pc:sldChg>
+      <pc:sldChg chg="modSp mod">
+        <pc:chgData name="Quang Hao" userId="43c94eade7a1fba8" providerId="LiveId" clId="{29A7A66F-1FFE-40D6-BD48-BC753ABCF831}" dt="2026-05-12T04:11:30.168" v="1" actId="26606"/>
+        <pc:sldMkLst>
+          <pc:docMk/>
+          <pc:sldMk cId="0" sldId="257"/>
+        </pc:sldMkLst>
+        <pc:spChg chg="mod">
+          <ac:chgData name="Quang Hao" userId="43c94eade7a1fba8" providerId="LiveId" clId="{29A7A66F-1FFE-40D6-BD48-BC753ABCF831}" dt="2026-05-12T04:11:30.168" v="1" actId="26606"/>
+          <ac:spMkLst>
+            <pc:docMk/>
+            <pc:sldMk cId="0" sldId="257"/>
+            <ac:spMk id="5" creationId="{00000000-0000-0000-0000-000000000000}"/>
+          </ac:spMkLst>
+        </pc:spChg>
+        <pc:spChg chg="mod">
+          <ac:chgData name="Quang Hao" userId="43c94eade7a1fba8" providerId="LiveId" clId="{29A7A66F-1FFE-40D6-BD48-BC753ABCF831}" dt="2026-05-12T04:11:30.168" v="1" actId="26606"/>
+          <ac:spMkLst>
+            <pc:docMk/>
+            <pc:sldMk cId="0" sldId="257"/>
+            <ac:spMk id="141" creationId="{00000000-0000-0000-0000-000000000000}"/>
+          </ac:spMkLst>
+        </pc:spChg>
+        <pc:picChg chg="mod">
+          <ac:chgData name="Quang Hao" userId="43c94eade7a1fba8" providerId="LiveId" clId="{29A7A66F-1FFE-40D6-BD48-BC753ABCF831}" dt="2026-05-12T04:11:30.168" v="1" actId="26606"/>
+          <ac:picMkLst>
+            <pc:docMk/>
+            <pc:sldMk cId="0" sldId="257"/>
+            <ac:picMk id="16" creationId="{00000000-0000-0000-0000-000000000000}"/>
+          </ac:picMkLst>
+        </pc:picChg>
+      </pc:sldChg>
+      <pc:sldChg chg="addSp delSp modSp mod">
+        <pc:chgData name="Quang Hao" userId="43c94eade7a1fba8" providerId="LiveId" clId="{29A7A66F-1FFE-40D6-BD48-BC753ABCF831}" dt="2026-05-12T04:11:30.168" v="1" actId="26606"/>
+        <pc:sldMkLst>
+          <pc:docMk/>
+          <pc:sldMk cId="0" sldId="285"/>
+        </pc:sldMkLst>
+        <pc:spChg chg="mod">
+          <ac:chgData name="Quang Hao" userId="43c94eade7a1fba8" providerId="LiveId" clId="{29A7A66F-1FFE-40D6-BD48-BC753ABCF831}" dt="2026-05-12T04:11:30.168" v="1" actId="26606"/>
+          <ac:spMkLst>
+            <pc:docMk/>
+            <pc:sldMk cId="0" sldId="285"/>
+            <ac:spMk id="2" creationId="{00000000-0000-0000-0000-000000000000}"/>
+          </ac:spMkLst>
+        </pc:spChg>
+        <pc:spChg chg="mod">
+          <ac:chgData name="Quang Hao" userId="43c94eade7a1fba8" providerId="LiveId" clId="{29A7A66F-1FFE-40D6-BD48-BC753ABCF831}" dt="2026-05-12T04:11:30.168" v="1" actId="26606"/>
+          <ac:spMkLst>
+            <pc:docMk/>
+            <pc:sldMk cId="0" sldId="285"/>
+            <ac:spMk id="4" creationId="{00000000-0000-0000-0000-000000000000}"/>
+          </ac:spMkLst>
+        </pc:spChg>
+        <pc:spChg chg="mod replId">
+          <ac:chgData name="Quang Hao" userId="43c94eade7a1fba8" providerId="LiveId" clId="{29A7A66F-1FFE-40D6-BD48-BC753ABCF831}" dt="2026-05-12T04:11:30.128" v="0" actId="26606"/>
+          <ac:spMkLst>
+            <pc:docMk/>
+            <pc:sldMk cId="0" sldId="285"/>
+            <ac:spMk id="6" creationId="{00000000-0000-0000-0000-000000000000}"/>
+          </ac:spMkLst>
+        </pc:spChg>
+        <pc:spChg chg="mod replId">
+          <ac:chgData name="Quang Hao" userId="43c94eade7a1fba8" providerId="LiveId" clId="{29A7A66F-1FFE-40D6-BD48-BC753ABCF831}" dt="2026-05-12T04:11:30.128" v="0" actId="26606"/>
+          <ac:spMkLst>
+            <pc:docMk/>
+            <pc:sldMk cId="0" sldId="285"/>
+            <ac:spMk id="7" creationId="{00000000-0000-0000-0000-000000000000}"/>
+          </ac:spMkLst>
+        </pc:spChg>
+        <pc:grpChg chg="add">
+          <ac:chgData name="Quang Hao" userId="43c94eade7a1fba8" providerId="LiveId" clId="{29A7A66F-1FFE-40D6-BD48-BC753ABCF831}" dt="2026-05-12T04:11:30.168" v="1" actId="26606"/>
+          <ac:grpSpMkLst>
+            <pc:docMk/>
+            <pc:sldMk cId="0" sldId="285"/>
+            <ac:grpSpMk id="5" creationId="{00000000-0000-0000-0000-000000000000}"/>
+          </ac:grpSpMkLst>
+        </pc:grpChg>
+        <pc:grpChg chg="del mod replId">
+          <ac:chgData name="Quang Hao" userId="43c94eade7a1fba8" providerId="LiveId" clId="{29A7A66F-1FFE-40D6-BD48-BC753ABCF831}" dt="2026-05-12T04:11:30.168" v="1" actId="26606"/>
+          <ac:grpSpMkLst>
+            <pc:docMk/>
+            <pc:sldMk cId="0" sldId="285"/>
+            <ac:grpSpMk id="9" creationId="{00000000-0000-0000-0000-000000000000}"/>
+          </ac:grpSpMkLst>
+        </pc:grpChg>
+        <pc:cxnChg chg="mod replId">
+          <ac:chgData name="Quang Hao" userId="43c94eade7a1fba8" providerId="LiveId" clId="{29A7A66F-1FFE-40D6-BD48-BC753ABCF831}" dt="2026-05-12T04:11:30.128" v="0" actId="26606"/>
+          <ac:cxnSpMkLst>
+            <pc:docMk/>
+            <pc:sldMk cId="0" sldId="285"/>
+            <ac:cxnSpMk id="8" creationId="{00000000-0000-0000-0000-000000000000}"/>
+          </ac:cxnSpMkLst>
+        </pc:cxnChg>
+      </pc:sldChg>
+      <pc:sldChg chg="modSp mod">
+        <pc:chgData name="Quang Hao" userId="43c94eade7a1fba8" providerId="LiveId" clId="{29A7A66F-1FFE-40D6-BD48-BC753ABCF831}" dt="2026-05-12T04:11:30.168" v="1" actId="26606"/>
+        <pc:sldMkLst>
+          <pc:docMk/>
+          <pc:sldMk cId="0" sldId="287"/>
+        </pc:sldMkLst>
+        <pc:spChg chg="mod">
+          <ac:chgData name="Quang Hao" userId="43c94eade7a1fba8" providerId="LiveId" clId="{29A7A66F-1FFE-40D6-BD48-BC753ABCF831}" dt="2026-05-12T04:11:30.168" v="1" actId="26606"/>
+          <ac:spMkLst>
+            <pc:docMk/>
+            <pc:sldMk cId="0" sldId="287"/>
+            <ac:spMk id="5" creationId="{00000000-0000-0000-0000-000000000000}"/>
+          </ac:spMkLst>
+        </pc:spChg>
+        <pc:spChg chg="mod">
+          <ac:chgData name="Quang Hao" userId="43c94eade7a1fba8" providerId="LiveId" clId="{29A7A66F-1FFE-40D6-BD48-BC753ABCF831}" dt="2026-05-12T04:11:30.168" v="1" actId="26606"/>
+          <ac:spMkLst>
+            <pc:docMk/>
+            <pc:sldMk cId="0" sldId="287"/>
+            <ac:spMk id="141" creationId="{00000000-0000-0000-0000-000000000000}"/>
+          </ac:spMkLst>
+        </pc:spChg>
+        <pc:picChg chg="mod">
+          <ac:chgData name="Quang Hao" userId="43c94eade7a1fba8" providerId="LiveId" clId="{29A7A66F-1FFE-40D6-BD48-BC753ABCF831}" dt="2026-05-12T04:11:30.168" v="1" actId="26606"/>
+          <ac:picMkLst>
+            <pc:docMk/>
+            <pc:sldMk cId="0" sldId="287"/>
+            <ac:picMk id="16" creationId="{00000000-0000-0000-0000-000000000000}"/>
+          </ac:picMkLst>
+        </pc:picChg>
+      </pc:sldChg>
+      <pc:sldChg chg="modSp mod">
+        <pc:chgData name="Quang Hao" userId="43c94eade7a1fba8" providerId="LiveId" clId="{29A7A66F-1FFE-40D6-BD48-BC753ABCF831}" dt="2026-05-12T04:11:30.168" v="1" actId="26606"/>
+        <pc:sldMkLst>
+          <pc:docMk/>
+          <pc:sldMk cId="0" sldId="288"/>
+        </pc:sldMkLst>
+        <pc:spChg chg="mod">
+          <ac:chgData name="Quang Hao" userId="43c94eade7a1fba8" providerId="LiveId" clId="{29A7A66F-1FFE-40D6-BD48-BC753ABCF831}" dt="2026-05-12T04:11:30.168" v="1" actId="26606"/>
+          <ac:spMkLst>
+            <pc:docMk/>
+            <pc:sldMk cId="0" sldId="288"/>
+            <ac:spMk id="5" creationId="{00000000-0000-0000-0000-000000000000}"/>
+          </ac:spMkLst>
+        </pc:spChg>
+        <pc:spChg chg="mod">
+          <ac:chgData name="Quang Hao" userId="43c94eade7a1fba8" providerId="LiveId" clId="{29A7A66F-1FFE-40D6-BD48-BC753ABCF831}" dt="2026-05-12T04:11:30.168" v="1" actId="26606"/>
+          <ac:spMkLst>
+            <pc:docMk/>
+            <pc:sldMk cId="0" sldId="288"/>
+            <ac:spMk id="141" creationId="{00000000-0000-0000-0000-000000000000}"/>
+          </ac:spMkLst>
+        </pc:spChg>
+        <pc:picChg chg="mod">
+          <ac:chgData name="Quang Hao" userId="43c94eade7a1fba8" providerId="LiveId" clId="{29A7A66F-1FFE-40D6-BD48-BC753ABCF831}" dt="2026-05-12T04:11:30.168" v="1" actId="26606"/>
+          <ac:picMkLst>
+            <pc:docMk/>
+            <pc:sldMk cId="0" sldId="288"/>
+            <ac:picMk id="16" creationId="{00000000-0000-0000-0000-000000000000}"/>
+          </ac:picMkLst>
+        </pc:picChg>
+      </pc:sldChg>
+      <pc:sldChg chg="modSp mod">
+        <pc:chgData name="Quang Hao" userId="43c94eade7a1fba8" providerId="LiveId" clId="{29A7A66F-1FFE-40D6-BD48-BC753ABCF831}" dt="2026-05-12T04:11:30.168" v="1" actId="26606"/>
+        <pc:sldMkLst>
+          <pc:docMk/>
+          <pc:sldMk cId="0" sldId="289"/>
+        </pc:sldMkLst>
+        <pc:spChg chg="mod">
+          <ac:chgData name="Quang Hao" userId="43c94eade7a1fba8" providerId="LiveId" clId="{29A7A66F-1FFE-40D6-BD48-BC753ABCF831}" dt="2026-05-12T04:11:30.168" v="1" actId="26606"/>
+          <ac:spMkLst>
+            <pc:docMk/>
+            <pc:sldMk cId="0" sldId="289"/>
+            <ac:spMk id="5" creationId="{00000000-0000-0000-0000-000000000000}"/>
+          </ac:spMkLst>
+        </pc:spChg>
+        <pc:spChg chg="mod">
+          <ac:chgData name="Quang Hao" userId="43c94eade7a1fba8" providerId="LiveId" clId="{29A7A66F-1FFE-40D6-BD48-BC753ABCF831}" dt="2026-05-12T04:11:30.168" v="1" actId="26606"/>
+          <ac:spMkLst>
+            <pc:docMk/>
+            <pc:sldMk cId="0" sldId="289"/>
+            <ac:spMk id="141" creationId="{00000000-0000-0000-0000-000000000000}"/>
+          </ac:spMkLst>
+        </pc:spChg>
+        <pc:picChg chg="mod">
+          <ac:chgData name="Quang Hao" userId="43c94eade7a1fba8" providerId="LiveId" clId="{29A7A66F-1FFE-40D6-BD48-BC753ABCF831}" dt="2026-05-12T04:11:30.168" v="1" actId="26606"/>
+          <ac:picMkLst>
+            <pc:docMk/>
+            <pc:sldMk cId="0" sldId="289"/>
+            <ac:picMk id="16" creationId="{00000000-0000-0000-0000-000000000000}"/>
+          </ac:picMkLst>
+        </pc:picChg>
+      </pc:sldChg>
+      <pc:sldChg chg="modSp mod">
+        <pc:chgData name="Quang Hao" userId="43c94eade7a1fba8" providerId="LiveId" clId="{29A7A66F-1FFE-40D6-BD48-BC753ABCF831}" dt="2026-05-12T04:11:30.168" v="1" actId="26606"/>
+        <pc:sldMkLst>
+          <pc:docMk/>
+          <pc:sldMk cId="0" sldId="290"/>
+        </pc:sldMkLst>
+        <pc:spChg chg="mod">
+          <ac:chgData name="Quang Hao" userId="43c94eade7a1fba8" providerId="LiveId" clId="{29A7A66F-1FFE-40D6-BD48-BC753ABCF831}" dt="2026-05-12T04:11:30.168" v="1" actId="26606"/>
+          <ac:spMkLst>
+            <pc:docMk/>
+            <pc:sldMk cId="0" sldId="290"/>
+            <ac:spMk id="9" creationId="{00000000-0000-0000-0000-000000000000}"/>
+          </ac:spMkLst>
+        </pc:spChg>
+        <pc:spChg chg="mod">
+          <ac:chgData name="Quang Hao" userId="43c94eade7a1fba8" providerId="LiveId" clId="{29A7A66F-1FFE-40D6-BD48-BC753ABCF831}" dt="2026-05-12T04:11:30.168" v="1" actId="26606"/>
+          <ac:spMkLst>
+            <pc:docMk/>
+            <pc:sldMk cId="0" sldId="290"/>
+            <ac:spMk id="141" creationId="{00000000-0000-0000-0000-000000000000}"/>
+          </ac:spMkLst>
+        </pc:spChg>
+        <pc:picChg chg="mod">
+          <ac:chgData name="Quang Hao" userId="43c94eade7a1fba8" providerId="LiveId" clId="{29A7A66F-1FFE-40D6-BD48-BC753ABCF831}" dt="2026-05-12T04:11:30.168" v="1" actId="26606"/>
+          <ac:picMkLst>
+            <pc:docMk/>
+            <pc:sldMk cId="0" sldId="290"/>
+            <ac:picMk id="16" creationId="{00000000-0000-0000-0000-000000000000}"/>
+          </ac:picMkLst>
+        </pc:picChg>
+      </pc:sldChg>
+    </pc:docChg>
+  </pc:docChgLst>
+</pc:chgInfo>
 </file>
 
 <file path=ppt/notesMasters/notesMaster1.xml><?xml version="1.0" encoding="utf-8"?>
@@ -333,7 +588,9 @@
               <a:defRPr sz="1100"/>
             </a:lvl9pPr>
           </a:lstStyle>
-          <a:p/>
+          <a:p>
+            <a:endParaRPr/>
+          </a:p>
         </p:txBody>
       </p:sp>
     </p:spTree>
@@ -572,7 +829,7 @@
 </file>
 
 <file path=ppt/notesSlides/notesSlide1.xml><?xml version="1.0" encoding="utf-8"?>
-<p:notes xmlns:a="http://schemas.openxmlformats.org/drawingml/2006/main" xmlns:r="http://schemas.openxmlformats.org/officeDocument/2006/relationships" xmlns:p="http://schemas.openxmlformats.org/presentationml/2006/main" showMasterPhAnim="0" showMasterSp="0">
+<p:notes xmlns:a="http://schemas.openxmlformats.org/drawingml/2006/main" xmlns:r="http://schemas.openxmlformats.org/officeDocument/2006/relationships" xmlns:p="http://schemas.openxmlformats.org/presentationml/2006/main" showMasterSp="0" showMasterPhAnim="0">
   <p:cSld>
     <p:spTree>
       <p:nvGrpSpPr>
@@ -663,6 +920,7 @@
               </a:spcAft>
               <a:buNone/>
             </a:pPr>
+            <a:endParaRPr/>
           </a:p>
         </p:txBody>
       </p:sp>
@@ -675,7 +933,7 @@
 </file>
 
 <file path=ppt/notesSlides/notesSlide2.xml><?xml version="1.0" encoding="utf-8"?>
-<p:notes xmlns:a="http://schemas.openxmlformats.org/drawingml/2006/main" xmlns:r="http://schemas.openxmlformats.org/officeDocument/2006/relationships" xmlns:p="http://schemas.openxmlformats.org/presentationml/2006/main" showMasterPhAnim="0" showMasterSp="0">
+<p:notes xmlns:a="http://schemas.openxmlformats.org/drawingml/2006/main" xmlns:r="http://schemas.openxmlformats.org/officeDocument/2006/relationships" xmlns:p="http://schemas.openxmlformats.org/presentationml/2006/main" showMasterSp="0" showMasterPhAnim="0">
   <p:cSld>
     <p:spTree>
       <p:nvGrpSpPr>
@@ -766,6 +1024,7 @@
               </a:spcAft>
               <a:buNone/>
             </a:pPr>
+            <a:endParaRPr/>
           </a:p>
         </p:txBody>
       </p:sp>
@@ -778,7 +1037,7 @@
 </file>
 
 <file path=ppt/notesSlides/notesSlide3.xml><?xml version="1.0" encoding="utf-8"?>
-<p:notes xmlns:a="http://schemas.openxmlformats.org/drawingml/2006/main" xmlns:r="http://schemas.openxmlformats.org/officeDocument/2006/relationships" xmlns:p="http://schemas.openxmlformats.org/presentationml/2006/main" showMasterPhAnim="0" showMasterSp="0">
+<p:notes xmlns:a="http://schemas.openxmlformats.org/drawingml/2006/main" xmlns:r="http://schemas.openxmlformats.org/officeDocument/2006/relationships" xmlns:p="http://schemas.openxmlformats.org/presentationml/2006/main" showMasterSp="0" showMasterPhAnim="0">
   <p:cSld>
     <p:spTree>
       <p:nvGrpSpPr>
@@ -869,6 +1128,7 @@
               </a:spcAft>
               <a:buNone/>
             </a:pPr>
+            <a:endParaRPr/>
           </a:p>
         </p:txBody>
       </p:sp>
@@ -881,7 +1141,7 @@
 </file>
 
 <file path=ppt/notesSlides/notesSlide4.xml><?xml version="1.0" encoding="utf-8"?>
-<p:notes xmlns:a="http://schemas.openxmlformats.org/drawingml/2006/main" xmlns:r="http://schemas.openxmlformats.org/officeDocument/2006/relationships" xmlns:p="http://schemas.openxmlformats.org/presentationml/2006/main" showMasterPhAnim="0" showMasterSp="0">
+<p:notes xmlns:a="http://schemas.openxmlformats.org/drawingml/2006/main" xmlns:r="http://schemas.openxmlformats.org/officeDocument/2006/relationships" xmlns:p="http://schemas.openxmlformats.org/presentationml/2006/main" showMasterSp="0" showMasterPhAnim="0">
   <p:cSld>
     <p:spTree>
       <p:nvGrpSpPr>
@@ -972,6 +1232,7 @@
               </a:spcAft>
               <a:buNone/>
             </a:pPr>
+            <a:endParaRPr/>
           </a:p>
         </p:txBody>
       </p:sp>
@@ -984,7 +1245,7 @@
 </file>
 
 <file path=ppt/notesSlides/notesSlide5.xml><?xml version="1.0" encoding="utf-8"?>
-<p:notes xmlns:a="http://schemas.openxmlformats.org/drawingml/2006/main" xmlns:r="http://schemas.openxmlformats.org/officeDocument/2006/relationships" xmlns:p="http://schemas.openxmlformats.org/presentationml/2006/main" showMasterPhAnim="0" showMasterSp="0">
+<p:notes xmlns:a="http://schemas.openxmlformats.org/drawingml/2006/main" xmlns:r="http://schemas.openxmlformats.org/officeDocument/2006/relationships" xmlns:p="http://schemas.openxmlformats.org/presentationml/2006/main" showMasterSp="0" showMasterPhAnim="0">
   <p:cSld>
     <p:spTree>
       <p:nvGrpSpPr>
@@ -1075,6 +1336,7 @@
               </a:spcAft>
               <a:buNone/>
             </a:pPr>
+            <a:endParaRPr/>
           </a:p>
         </p:txBody>
       </p:sp>
@@ -1087,7 +1349,7 @@
 </file>
 
 <file path=ppt/notesSlides/notesSlide6.xml><?xml version="1.0" encoding="utf-8"?>
-<p:notes xmlns:a="http://schemas.openxmlformats.org/drawingml/2006/main" xmlns:r="http://schemas.openxmlformats.org/officeDocument/2006/relationships" xmlns:p="http://schemas.openxmlformats.org/presentationml/2006/main" showMasterPhAnim="0" showMasterSp="0">
+<p:notes xmlns:a="http://schemas.openxmlformats.org/drawingml/2006/main" xmlns:r="http://schemas.openxmlformats.org/officeDocument/2006/relationships" xmlns:p="http://schemas.openxmlformats.org/presentationml/2006/main" showMasterSp="0" showMasterPhAnim="0">
   <p:cSld>
     <p:spTree>
       <p:nvGrpSpPr>
@@ -1178,6 +1440,7 @@
               </a:spcAft>
               <a:buNone/>
             </a:pPr>
+            <a:endParaRPr/>
           </a:p>
         </p:txBody>
       </p:sp>
@@ -1190,7 +1453,7 @@
 </file>
 
 <file path=ppt/notesSlides/notesSlide7.xml><?xml version="1.0" encoding="utf-8"?>
-<p:notes xmlns:a="http://schemas.openxmlformats.org/drawingml/2006/main" xmlns:r="http://schemas.openxmlformats.org/officeDocument/2006/relationships" xmlns:p="http://schemas.openxmlformats.org/presentationml/2006/main" showMasterPhAnim="0" showMasterSp="0">
+<p:notes xmlns:a="http://schemas.openxmlformats.org/drawingml/2006/main" xmlns:r="http://schemas.openxmlformats.org/officeDocument/2006/relationships" xmlns:p="http://schemas.openxmlformats.org/presentationml/2006/main" showMasterSp="0" showMasterPhAnim="0">
   <p:cSld>
     <p:spTree>
       <p:nvGrpSpPr>
@@ -1281,6 +1544,7 @@
               </a:spcAft>
               <a:buNone/>
             </a:pPr>
+            <a:endParaRPr/>
           </a:p>
         </p:txBody>
       </p:sp>
@@ -1337,7 +1601,6 @@
               <a:rPr lang="en-US"/>
               <a:t>Click to edit Master title style</a:t>
             </a:r>
-            <a:endParaRPr lang="en-US"/>
           </a:p>
         </p:txBody>
       </p:sp>
@@ -1402,7 +1665,6 @@
               <a:rPr lang="en-US"/>
               <a:t>Click to edit Master subtitle style</a:t>
             </a:r>
-            <a:endParaRPr lang="en-US"/>
           </a:p>
         </p:txBody>
       </p:sp>
@@ -1423,6 +1685,7 @@
           <a:p>
             <a:fld id="{5F1F6629-F5FD-422B-A222-E9DBAF0EEAD1}" type="datetimeFigureOut">
               <a:rPr lang="en-US" smtClean="0"/>
+              <a:t>5/12/2026</a:t>
             </a:fld>
             <a:endParaRPr lang="en-US"/>
           </a:p>
@@ -1473,6 +1736,7 @@
             </a:pPr>
             <a:fld id="{00000000-1234-1234-1234-123412341234}" type="slidenum">
               <a:rPr lang="en-US" smtClean="0"/>
+              <a:t>‹#›</a:t>
             </a:fld>
             <a:endParaRPr lang="en-US"/>
           </a:p>
@@ -1485,11 +1749,11 @@
   </p:clrMapOvr>
   <mc:AlternateContent xmlns:mc="http://schemas.openxmlformats.org/markup-compatibility/2006" xmlns:p159="http://schemas.microsoft.com/office/powerpoint/2015/09/main">
     <mc:Choice Requires="p159">
-      <p:transition xmlns:p14="http://schemas.microsoft.com/office/powerpoint/2010/main">
+      <p:transition>
         <p159:morph option="byObject"/>
       </p:transition>
     </mc:Choice>
-    <mc:Fallback>
+    <mc:Fallback xmlns="">
       <p:transition>
         <p:fade/>
       </p:transition>
@@ -1535,7 +1799,6 @@
               <a:rPr lang="en-US"/>
               <a:t>Click to edit Master title style</a:t>
             </a:r>
-            <a:endParaRPr lang="en-US"/>
           </a:p>
         </p:txBody>
       </p:sp>
@@ -1559,7 +1822,6 @@
               <a:rPr lang="en-US"/>
               <a:t>Click to edit Master text styles</a:t>
             </a:r>
-            <a:endParaRPr lang="en-US"/>
           </a:p>
           <a:p>
             <a:pPr lvl="1"/>
@@ -1567,7 +1829,6 @@
               <a:rPr lang="en-US"/>
               <a:t>Second level</a:t>
             </a:r>
-            <a:endParaRPr lang="en-US"/>
           </a:p>
           <a:p>
             <a:pPr lvl="2"/>
@@ -1575,7 +1836,6 @@
               <a:rPr lang="en-US"/>
               <a:t>Third level</a:t>
             </a:r>
-            <a:endParaRPr lang="en-US"/>
           </a:p>
           <a:p>
             <a:pPr lvl="3"/>
@@ -1583,7 +1843,6 @@
               <a:rPr lang="en-US"/>
               <a:t>Fourth level</a:t>
             </a:r>
-            <a:endParaRPr lang="en-US"/>
           </a:p>
           <a:p>
             <a:pPr lvl="4"/>
@@ -1591,7 +1850,6 @@
               <a:rPr lang="en-US"/>
               <a:t>Fifth level</a:t>
             </a:r>
-            <a:endParaRPr lang="en-US"/>
           </a:p>
         </p:txBody>
       </p:sp>
@@ -1612,6 +1870,7 @@
           <a:p>
             <a:fld id="{5F1F6629-F5FD-422B-A222-E9DBAF0EEAD1}" type="datetimeFigureOut">
               <a:rPr lang="en-US" smtClean="0"/>
+              <a:t>5/12/2026</a:t>
             </a:fld>
             <a:endParaRPr lang="en-US"/>
           </a:p>
@@ -1662,6 +1921,7 @@
             </a:pPr>
             <a:fld id="{00000000-1234-1234-1234-123412341234}" type="slidenum">
               <a:rPr lang="en-US" smtClean="0"/>
+              <a:t>‹#›</a:t>
             </a:fld>
             <a:endParaRPr lang="en-US"/>
           </a:p>
@@ -1674,11 +1934,11 @@
   </p:clrMapOvr>
   <mc:AlternateContent xmlns:mc="http://schemas.openxmlformats.org/markup-compatibility/2006" xmlns:p159="http://schemas.microsoft.com/office/powerpoint/2015/09/main">
     <mc:Choice Requires="p159">
-      <p:transition xmlns:p14="http://schemas.microsoft.com/office/powerpoint/2010/main">
+      <p:transition>
         <p159:morph option="byObject"/>
       </p:transition>
     </mc:Choice>
-    <mc:Fallback>
+    <mc:Fallback xmlns="">
       <p:transition>
         <p:fade/>
       </p:transition>
@@ -1729,7 +1989,6 @@
               <a:rPr lang="en-US"/>
               <a:t>Click to edit Master title style</a:t>
             </a:r>
-            <a:endParaRPr lang="en-US"/>
           </a:p>
         </p:txBody>
       </p:sp>
@@ -1758,7 +2017,6 @@
               <a:rPr lang="en-US"/>
               <a:t>Click to edit Master text styles</a:t>
             </a:r>
-            <a:endParaRPr lang="en-US"/>
           </a:p>
           <a:p>
             <a:pPr lvl="1"/>
@@ -1766,7 +2024,6 @@
               <a:rPr lang="en-US"/>
               <a:t>Second level</a:t>
             </a:r>
-            <a:endParaRPr lang="en-US"/>
           </a:p>
           <a:p>
             <a:pPr lvl="2"/>
@@ -1774,7 +2031,6 @@
               <a:rPr lang="en-US"/>
               <a:t>Third level</a:t>
             </a:r>
-            <a:endParaRPr lang="en-US"/>
           </a:p>
           <a:p>
             <a:pPr lvl="3"/>
@@ -1782,7 +2038,6 @@
               <a:rPr lang="en-US"/>
               <a:t>Fourth level</a:t>
             </a:r>
-            <a:endParaRPr lang="en-US"/>
           </a:p>
           <a:p>
             <a:pPr lvl="4"/>
@@ -1790,7 +2045,6 @@
               <a:rPr lang="en-US"/>
               <a:t>Fifth level</a:t>
             </a:r>
-            <a:endParaRPr lang="en-US"/>
           </a:p>
         </p:txBody>
       </p:sp>
@@ -1811,6 +2065,7 @@
           <a:p>
             <a:fld id="{5F1F6629-F5FD-422B-A222-E9DBAF0EEAD1}" type="datetimeFigureOut">
               <a:rPr lang="en-US" smtClean="0"/>
+              <a:t>5/12/2026</a:t>
             </a:fld>
             <a:endParaRPr lang="en-US"/>
           </a:p>
@@ -1861,6 +2116,7 @@
             </a:pPr>
             <a:fld id="{00000000-1234-1234-1234-123412341234}" type="slidenum">
               <a:rPr lang="en-US" smtClean="0"/>
+              <a:t>‹#›</a:t>
             </a:fld>
             <a:endParaRPr lang="en-US"/>
           </a:p>
@@ -1873,11 +2129,11 @@
   </p:clrMapOvr>
   <mc:AlternateContent xmlns:mc="http://schemas.openxmlformats.org/markup-compatibility/2006" xmlns:p159="http://schemas.microsoft.com/office/powerpoint/2015/09/main">
     <mc:Choice Requires="p159">
-      <p:transition xmlns:p14="http://schemas.microsoft.com/office/powerpoint/2010/main">
+      <p:transition>
         <p159:morph option="byObject"/>
       </p:transition>
     </mc:Choice>
-    <mc:Fallback>
+    <mc:Fallback xmlns="">
       <p:transition>
         <p:fade/>
       </p:transition>
@@ -1888,7 +2144,7 @@
 </file>
 
 <file path=ppt/slideLayouts/slideLayout12.xml><?xml version="1.0" encoding="utf-8"?>
-<p:sldLayout xmlns:a="http://schemas.openxmlformats.org/drawingml/2006/main" xmlns:r="http://schemas.openxmlformats.org/officeDocument/2006/relationships" xmlns:p="http://schemas.openxmlformats.org/presentationml/2006/main" type="tx" matchingName="Title and body">
+<p:sldLayout xmlns:a="http://schemas.openxmlformats.org/drawingml/2006/main" xmlns:r="http://schemas.openxmlformats.org/officeDocument/2006/relationships" xmlns:p="http://schemas.openxmlformats.org/presentationml/2006/main" matchingName="Title and body" type="tx">
   <p:cSld name="Title and body">
     <p:spTree>
       <p:nvGrpSpPr>
@@ -2028,7 +2284,9 @@
               <a:defRPr sz="2400"/>
             </a:lvl9pPr>
           </a:lstStyle>
-          <a:p/>
+          <a:p>
+            <a:endParaRPr/>
+          </a:p>
         </p:txBody>
       </p:sp>
       <p:sp>
@@ -2155,7 +2413,9 @@
               <a:defRPr/>
             </a:lvl9pPr>
           </a:lstStyle>
-          <a:p/>
+          <a:p>
+            <a:endParaRPr/>
+          </a:p>
         </p:txBody>
       </p:sp>
       <p:sp>
@@ -2231,6 +2491,7 @@
             </a:pPr>
             <a:fld id="{00000000-1234-1234-1234-123412341234}" type="slidenum">
               <a:rPr lang="en-US"/>
+              <a:t>‹#›</a:t>
             </a:fld>
             <a:endParaRPr lang="en-US"/>
           </a:p>
@@ -2243,11 +2504,11 @@
   </p:clrMapOvr>
   <mc:AlternateContent xmlns:mc="http://schemas.openxmlformats.org/markup-compatibility/2006" xmlns:p159="http://schemas.microsoft.com/office/powerpoint/2015/09/main">
     <mc:Choice Requires="p159">
-      <p:transition xmlns:p14="http://schemas.microsoft.com/office/powerpoint/2010/main">
+      <p:transition>
         <p159:morph option="byObject"/>
       </p:transition>
     </mc:Choice>
-    <mc:Fallback>
+    <mc:Fallback xmlns="">
       <p:transition>
         <p:fade/>
       </p:transition>
@@ -2292,7 +2553,6 @@
               <a:rPr lang="en-US"/>
               <a:t>Click to edit Master title style</a:t>
             </a:r>
-            <a:endParaRPr lang="en-US"/>
           </a:p>
         </p:txBody>
       </p:sp>
@@ -2316,7 +2576,6 @@
               <a:rPr lang="en-US"/>
               <a:t>Click to edit Master text styles</a:t>
             </a:r>
-            <a:endParaRPr lang="en-US"/>
           </a:p>
           <a:p>
             <a:pPr lvl="1"/>
@@ -2324,7 +2583,6 @@
               <a:rPr lang="en-US"/>
               <a:t>Second level</a:t>
             </a:r>
-            <a:endParaRPr lang="en-US"/>
           </a:p>
           <a:p>
             <a:pPr lvl="2"/>
@@ -2332,7 +2590,6 @@
               <a:rPr lang="en-US"/>
               <a:t>Third level</a:t>
             </a:r>
-            <a:endParaRPr lang="en-US"/>
           </a:p>
           <a:p>
             <a:pPr lvl="3"/>
@@ -2340,7 +2597,6 @@
               <a:rPr lang="en-US"/>
               <a:t>Fourth level</a:t>
             </a:r>
-            <a:endParaRPr lang="en-US"/>
           </a:p>
           <a:p>
             <a:pPr lvl="4"/>
@@ -2348,7 +2604,6 @@
               <a:rPr lang="en-US"/>
               <a:t>Fifth level</a:t>
             </a:r>
-            <a:endParaRPr lang="en-US"/>
           </a:p>
         </p:txBody>
       </p:sp>
@@ -2369,6 +2624,7 @@
           <a:p>
             <a:fld id="{5F1F6629-F5FD-422B-A222-E9DBAF0EEAD1}" type="datetimeFigureOut">
               <a:rPr lang="en-US" smtClean="0"/>
+              <a:t>5/12/2026</a:t>
             </a:fld>
             <a:endParaRPr lang="en-US"/>
           </a:p>
@@ -2419,6 +2675,7 @@
             </a:pPr>
             <a:fld id="{00000000-1234-1234-1234-123412341234}" type="slidenum">
               <a:rPr lang="en-US" smtClean="0"/>
+              <a:t>‹#›</a:t>
             </a:fld>
             <a:endParaRPr lang="en-US"/>
           </a:p>
@@ -2431,11 +2688,11 @@
   </p:clrMapOvr>
   <mc:AlternateContent xmlns:mc="http://schemas.openxmlformats.org/markup-compatibility/2006" xmlns:p159="http://schemas.microsoft.com/office/powerpoint/2015/09/main">
     <mc:Choice Requires="p159">
-      <p:transition xmlns:p14="http://schemas.microsoft.com/office/powerpoint/2010/main">
+      <p:transition>
         <p159:morph option="byObject"/>
       </p:transition>
     </mc:Choice>
-    <mc:Fallback>
+    <mc:Fallback xmlns="">
       <p:transition>
         <p:fade/>
       </p:transition>
@@ -2490,7 +2747,6 @@
               <a:rPr lang="en-US"/>
               <a:t>Click to edit Master title style</a:t>
             </a:r>
-            <a:endParaRPr lang="en-US"/>
           </a:p>
         </p:txBody>
       </p:sp>
@@ -2610,7 +2866,6 @@
               <a:rPr lang="en-US"/>
               <a:t>Click to edit Master text styles</a:t>
             </a:r>
-            <a:endParaRPr lang="en-US"/>
           </a:p>
         </p:txBody>
       </p:sp>
@@ -2631,6 +2886,7 @@
           <a:p>
             <a:fld id="{5F1F6629-F5FD-422B-A222-E9DBAF0EEAD1}" type="datetimeFigureOut">
               <a:rPr lang="en-US" smtClean="0"/>
+              <a:t>5/12/2026</a:t>
             </a:fld>
             <a:endParaRPr lang="en-US"/>
           </a:p>
@@ -2681,6 +2937,7 @@
             </a:pPr>
             <a:fld id="{00000000-1234-1234-1234-123412341234}" type="slidenum">
               <a:rPr lang="en-US" smtClean="0"/>
+              <a:t>‹#›</a:t>
             </a:fld>
             <a:endParaRPr lang="en-US"/>
           </a:p>
@@ -2693,11 +2950,11 @@
   </p:clrMapOvr>
   <mc:AlternateContent xmlns:mc="http://schemas.openxmlformats.org/markup-compatibility/2006" xmlns:p159="http://schemas.microsoft.com/office/powerpoint/2015/09/main">
     <mc:Choice Requires="p159">
-      <p:transition xmlns:p14="http://schemas.microsoft.com/office/powerpoint/2010/main">
+      <p:transition>
         <p159:morph option="byObject"/>
       </p:transition>
     </mc:Choice>
-    <mc:Fallback>
+    <mc:Fallback xmlns="">
       <p:transition>
         <p:fade/>
       </p:transition>
@@ -2743,7 +3000,6 @@
               <a:rPr lang="en-US"/>
               <a:t>Click to edit Master title style</a:t>
             </a:r>
-            <a:endParaRPr lang="en-US"/>
           </a:p>
         </p:txBody>
       </p:sp>
@@ -2772,7 +3028,6 @@
               <a:rPr lang="en-US"/>
               <a:t>Click to edit Master text styles</a:t>
             </a:r>
-            <a:endParaRPr lang="en-US"/>
           </a:p>
           <a:p>
             <a:pPr lvl="1"/>
@@ -2780,7 +3035,6 @@
               <a:rPr lang="en-US"/>
               <a:t>Second level</a:t>
             </a:r>
-            <a:endParaRPr lang="en-US"/>
           </a:p>
           <a:p>
             <a:pPr lvl="2"/>
@@ -2788,7 +3042,6 @@
               <a:rPr lang="en-US"/>
               <a:t>Third level</a:t>
             </a:r>
-            <a:endParaRPr lang="en-US"/>
           </a:p>
           <a:p>
             <a:pPr lvl="3"/>
@@ -2796,7 +3049,6 @@
               <a:rPr lang="en-US"/>
               <a:t>Fourth level</a:t>
             </a:r>
-            <a:endParaRPr lang="en-US"/>
           </a:p>
           <a:p>
             <a:pPr lvl="4"/>
@@ -2804,7 +3056,6 @@
               <a:rPr lang="en-US"/>
               <a:t>Fifth level</a:t>
             </a:r>
-            <a:endParaRPr lang="en-US"/>
           </a:p>
         </p:txBody>
       </p:sp>
@@ -2833,7 +3084,6 @@
               <a:rPr lang="en-US"/>
               <a:t>Click to edit Master text styles</a:t>
             </a:r>
-            <a:endParaRPr lang="en-US"/>
           </a:p>
           <a:p>
             <a:pPr lvl="1"/>
@@ -2841,7 +3091,6 @@
               <a:rPr lang="en-US"/>
               <a:t>Second level</a:t>
             </a:r>
-            <a:endParaRPr lang="en-US"/>
           </a:p>
           <a:p>
             <a:pPr lvl="2"/>
@@ -2849,7 +3098,6 @@
               <a:rPr lang="en-US"/>
               <a:t>Third level</a:t>
             </a:r>
-            <a:endParaRPr lang="en-US"/>
           </a:p>
           <a:p>
             <a:pPr lvl="3"/>
@@ -2857,7 +3105,6 @@
               <a:rPr lang="en-US"/>
               <a:t>Fourth level</a:t>
             </a:r>
-            <a:endParaRPr lang="en-US"/>
           </a:p>
           <a:p>
             <a:pPr lvl="4"/>
@@ -2865,7 +3112,6 @@
               <a:rPr lang="en-US"/>
               <a:t>Fifth level</a:t>
             </a:r>
-            <a:endParaRPr lang="en-US"/>
           </a:p>
         </p:txBody>
       </p:sp>
@@ -2886,6 +3132,7 @@
           <a:p>
             <a:fld id="{5F1F6629-F5FD-422B-A222-E9DBAF0EEAD1}" type="datetimeFigureOut">
               <a:rPr lang="en-US" smtClean="0"/>
+              <a:t>5/12/2026</a:t>
             </a:fld>
             <a:endParaRPr lang="en-US"/>
           </a:p>
@@ -2936,6 +3183,7 @@
             </a:pPr>
             <a:fld id="{00000000-1234-1234-1234-123412341234}" type="slidenum">
               <a:rPr lang="en-US" smtClean="0"/>
+              <a:t>‹#›</a:t>
             </a:fld>
             <a:endParaRPr lang="en-US"/>
           </a:p>
@@ -2948,11 +3196,11 @@
   </p:clrMapOvr>
   <mc:AlternateContent xmlns:mc="http://schemas.openxmlformats.org/markup-compatibility/2006" xmlns:p159="http://schemas.microsoft.com/office/powerpoint/2015/09/main">
     <mc:Choice Requires="p159">
-      <p:transition xmlns:p14="http://schemas.microsoft.com/office/powerpoint/2010/main">
+      <p:transition>
         <p159:morph option="byObject"/>
       </p:transition>
     </mc:Choice>
-    <mc:Fallback>
+    <mc:Fallback xmlns="">
       <p:transition>
         <p:fade/>
       </p:transition>
@@ -3003,7 +3251,6 @@
               <a:rPr lang="en-US"/>
               <a:t>Click to edit Master title style</a:t>
             </a:r>
-            <a:endParaRPr lang="en-US"/>
           </a:p>
         </p:txBody>
       </p:sp>
@@ -3069,7 +3316,6 @@
               <a:rPr lang="en-US"/>
               <a:t>Click to edit Master text styles</a:t>
             </a:r>
-            <a:endParaRPr lang="en-US"/>
           </a:p>
         </p:txBody>
       </p:sp>
@@ -3098,7 +3344,6 @@
               <a:rPr lang="en-US"/>
               <a:t>Click to edit Master text styles</a:t>
             </a:r>
-            <a:endParaRPr lang="en-US"/>
           </a:p>
           <a:p>
             <a:pPr lvl="1"/>
@@ -3106,7 +3351,6 @@
               <a:rPr lang="en-US"/>
               <a:t>Second level</a:t>
             </a:r>
-            <a:endParaRPr lang="en-US"/>
           </a:p>
           <a:p>
             <a:pPr lvl="2"/>
@@ -3114,7 +3358,6 @@
               <a:rPr lang="en-US"/>
               <a:t>Third level</a:t>
             </a:r>
-            <a:endParaRPr lang="en-US"/>
           </a:p>
           <a:p>
             <a:pPr lvl="3"/>
@@ -3122,7 +3365,6 @@
               <a:rPr lang="en-US"/>
               <a:t>Fourth level</a:t>
             </a:r>
-            <a:endParaRPr lang="en-US"/>
           </a:p>
           <a:p>
             <a:pPr lvl="4"/>
@@ -3130,7 +3372,6 @@
               <a:rPr lang="en-US"/>
               <a:t>Fifth level</a:t>
             </a:r>
-            <a:endParaRPr lang="en-US"/>
           </a:p>
         </p:txBody>
       </p:sp>
@@ -3196,7 +3437,6 @@
               <a:rPr lang="en-US"/>
               <a:t>Click to edit Master text styles</a:t>
             </a:r>
-            <a:endParaRPr lang="en-US"/>
           </a:p>
         </p:txBody>
       </p:sp>
@@ -3225,7 +3465,6 @@
               <a:rPr lang="en-US"/>
               <a:t>Click to edit Master text styles</a:t>
             </a:r>
-            <a:endParaRPr lang="en-US"/>
           </a:p>
           <a:p>
             <a:pPr lvl="1"/>
@@ -3233,7 +3472,6 @@
               <a:rPr lang="en-US"/>
               <a:t>Second level</a:t>
             </a:r>
-            <a:endParaRPr lang="en-US"/>
           </a:p>
           <a:p>
             <a:pPr lvl="2"/>
@@ -3241,7 +3479,6 @@
               <a:rPr lang="en-US"/>
               <a:t>Third level</a:t>
             </a:r>
-            <a:endParaRPr lang="en-US"/>
           </a:p>
           <a:p>
             <a:pPr lvl="3"/>
@@ -3249,7 +3486,6 @@
               <a:rPr lang="en-US"/>
               <a:t>Fourth level</a:t>
             </a:r>
-            <a:endParaRPr lang="en-US"/>
           </a:p>
           <a:p>
             <a:pPr lvl="4"/>
@@ -3257,7 +3493,6 @@
               <a:rPr lang="en-US"/>
               <a:t>Fifth level</a:t>
             </a:r>
-            <a:endParaRPr lang="en-US"/>
           </a:p>
         </p:txBody>
       </p:sp>
@@ -3278,6 +3513,7 @@
           <a:p>
             <a:fld id="{5F1F6629-F5FD-422B-A222-E9DBAF0EEAD1}" type="datetimeFigureOut">
               <a:rPr lang="en-US" smtClean="0"/>
+              <a:t>5/12/2026</a:t>
             </a:fld>
             <a:endParaRPr lang="en-US"/>
           </a:p>
@@ -3328,6 +3564,7 @@
             </a:pPr>
             <a:fld id="{00000000-1234-1234-1234-123412341234}" type="slidenum">
               <a:rPr lang="en-US" smtClean="0"/>
+              <a:t>‹#›</a:t>
             </a:fld>
             <a:endParaRPr lang="en-US"/>
           </a:p>
@@ -3340,11 +3577,11 @@
   </p:clrMapOvr>
   <mc:AlternateContent xmlns:mc="http://schemas.openxmlformats.org/markup-compatibility/2006" xmlns:p159="http://schemas.microsoft.com/office/powerpoint/2015/09/main">
     <mc:Choice Requires="p159">
-      <p:transition xmlns:p14="http://schemas.microsoft.com/office/powerpoint/2010/main">
+      <p:transition>
         <p159:morph option="byObject"/>
       </p:transition>
     </mc:Choice>
-    <mc:Fallback>
+    <mc:Fallback xmlns="">
       <p:transition>
         <p:fade/>
       </p:transition>
@@ -3390,7 +3627,6 @@
               <a:rPr lang="en-US"/>
               <a:t>Click to edit Master title style</a:t>
             </a:r>
-            <a:endParaRPr lang="en-US"/>
           </a:p>
         </p:txBody>
       </p:sp>
@@ -3411,6 +3647,7 @@
           <a:p>
             <a:fld id="{5F1F6629-F5FD-422B-A222-E9DBAF0EEAD1}" type="datetimeFigureOut">
               <a:rPr lang="en-US" smtClean="0"/>
+              <a:t>5/12/2026</a:t>
             </a:fld>
             <a:endParaRPr lang="en-US"/>
           </a:p>
@@ -3461,6 +3698,7 @@
             </a:pPr>
             <a:fld id="{00000000-1234-1234-1234-123412341234}" type="slidenum">
               <a:rPr lang="en-US" smtClean="0"/>
+              <a:t>‹#›</a:t>
             </a:fld>
             <a:endParaRPr lang="en-US"/>
           </a:p>
@@ -3473,11 +3711,11 @@
   </p:clrMapOvr>
   <mc:AlternateContent xmlns:mc="http://schemas.openxmlformats.org/markup-compatibility/2006" xmlns:p159="http://schemas.microsoft.com/office/powerpoint/2015/09/main">
     <mc:Choice Requires="p159">
-      <p:transition xmlns:p14="http://schemas.microsoft.com/office/powerpoint/2010/main">
+      <p:transition>
         <p159:morph option="byObject"/>
       </p:transition>
     </mc:Choice>
-    <mc:Fallback>
+    <mc:Fallback xmlns="">
       <p:transition>
         <p:fade/>
       </p:transition>
@@ -3521,6 +3759,7 @@
           <a:p>
             <a:fld id="{5F1F6629-F5FD-422B-A222-E9DBAF0EEAD1}" type="datetimeFigureOut">
               <a:rPr lang="en-US" smtClean="0"/>
+              <a:t>5/12/2026</a:t>
             </a:fld>
             <a:endParaRPr lang="en-US"/>
           </a:p>
@@ -3571,6 +3810,7 @@
             </a:pPr>
             <a:fld id="{00000000-1234-1234-1234-123412341234}" type="slidenum">
               <a:rPr lang="en-US" smtClean="0"/>
+              <a:t>‹#›</a:t>
             </a:fld>
             <a:endParaRPr lang="en-US"/>
           </a:p>
@@ -3583,11 +3823,11 @@
   </p:clrMapOvr>
   <mc:AlternateContent xmlns:mc="http://schemas.openxmlformats.org/markup-compatibility/2006" xmlns:p159="http://schemas.microsoft.com/office/powerpoint/2015/09/main">
     <mc:Choice Requires="p159">
-      <p:transition xmlns:p14="http://schemas.microsoft.com/office/powerpoint/2010/main">
+      <p:transition>
         <p159:morph option="byObject"/>
       </p:transition>
     </mc:Choice>
-    <mc:Fallback>
+    <mc:Fallback xmlns="">
       <p:transition>
         <p:fade/>
       </p:transition>
@@ -3641,7 +3881,6 @@
               <a:rPr lang="en-US"/>
               <a:t>Click to edit Master title style</a:t>
             </a:r>
-            <a:endParaRPr lang="en-US"/>
           </a:p>
         </p:txBody>
       </p:sp>
@@ -3698,7 +3937,6 @@
               <a:rPr lang="en-US"/>
               <a:t>Click to edit Master text styles</a:t>
             </a:r>
-            <a:endParaRPr lang="en-US"/>
           </a:p>
           <a:p>
             <a:pPr lvl="1"/>
@@ -3706,7 +3944,6 @@
               <a:rPr lang="en-US"/>
               <a:t>Second level</a:t>
             </a:r>
-            <a:endParaRPr lang="en-US"/>
           </a:p>
           <a:p>
             <a:pPr lvl="2"/>
@@ -3714,7 +3951,6 @@
               <a:rPr lang="en-US"/>
               <a:t>Third level</a:t>
             </a:r>
-            <a:endParaRPr lang="en-US"/>
           </a:p>
           <a:p>
             <a:pPr lvl="3"/>
@@ -3722,7 +3958,6 @@
               <a:rPr lang="en-US"/>
               <a:t>Fourth level</a:t>
             </a:r>
-            <a:endParaRPr lang="en-US"/>
           </a:p>
           <a:p>
             <a:pPr lvl="4"/>
@@ -3730,7 +3965,6 @@
               <a:rPr lang="en-US"/>
               <a:t>Fifth level</a:t>
             </a:r>
-            <a:endParaRPr lang="en-US"/>
           </a:p>
         </p:txBody>
       </p:sp>
@@ -3796,7 +4030,6 @@
               <a:rPr lang="en-US"/>
               <a:t>Click to edit Master text styles</a:t>
             </a:r>
-            <a:endParaRPr lang="en-US"/>
           </a:p>
         </p:txBody>
       </p:sp>
@@ -3817,6 +4050,7 @@
           <a:p>
             <a:fld id="{5F1F6629-F5FD-422B-A222-E9DBAF0EEAD1}" type="datetimeFigureOut">
               <a:rPr lang="en-US" smtClean="0"/>
+              <a:t>5/12/2026</a:t>
             </a:fld>
             <a:endParaRPr lang="en-US"/>
           </a:p>
@@ -3867,6 +4101,7 @@
             </a:pPr>
             <a:fld id="{00000000-1234-1234-1234-123412341234}" type="slidenum">
               <a:rPr lang="en-US" smtClean="0"/>
+              <a:t>‹#›</a:t>
             </a:fld>
             <a:endParaRPr lang="en-US"/>
           </a:p>
@@ -3879,11 +4114,11 @@
   </p:clrMapOvr>
   <mc:AlternateContent xmlns:mc="http://schemas.openxmlformats.org/markup-compatibility/2006" xmlns:p159="http://schemas.microsoft.com/office/powerpoint/2015/09/main">
     <mc:Choice Requires="p159">
-      <p:transition xmlns:p14="http://schemas.microsoft.com/office/powerpoint/2010/main">
+      <p:transition>
         <p159:morph option="byObject"/>
       </p:transition>
     </mc:Choice>
-    <mc:Fallback>
+    <mc:Fallback xmlns="">
       <p:transition>
         <p:fade/>
       </p:transition>
@@ -3938,7 +4173,6 @@
               <a:rPr lang="en-US"/>
               <a:t>Click to edit Master title style</a:t>
             </a:r>
-            <a:endParaRPr lang="en-US"/>
           </a:p>
         </p:txBody>
       </p:sp>
@@ -4065,7 +4299,6 @@
               <a:rPr lang="en-US"/>
               <a:t>Click to edit Master text styles</a:t>
             </a:r>
-            <a:endParaRPr lang="en-US"/>
           </a:p>
         </p:txBody>
       </p:sp>
@@ -4086,6 +4319,7 @@
           <a:p>
             <a:fld id="{5F1F6629-F5FD-422B-A222-E9DBAF0EEAD1}" type="datetimeFigureOut">
               <a:rPr lang="en-US" smtClean="0"/>
+              <a:t>5/12/2026</a:t>
             </a:fld>
             <a:endParaRPr lang="en-US"/>
           </a:p>
@@ -4136,6 +4370,7 @@
             </a:pPr>
             <a:fld id="{00000000-1234-1234-1234-123412341234}" type="slidenum">
               <a:rPr lang="en-US" smtClean="0"/>
+              <a:t>‹#›</a:t>
             </a:fld>
             <a:endParaRPr lang="en-US"/>
           </a:p>
@@ -4148,11 +4383,11 @@
   </p:clrMapOvr>
   <mc:AlternateContent xmlns:mc="http://schemas.openxmlformats.org/markup-compatibility/2006" xmlns:p159="http://schemas.microsoft.com/office/powerpoint/2015/09/main">
     <mc:Choice Requires="p159">
-      <p:transition xmlns:p14="http://schemas.microsoft.com/office/powerpoint/2010/main">
+      <p:transition>
         <p159:morph option="byObject"/>
       </p:transition>
     </mc:Choice>
-    <mc:Fallback>
+    <mc:Fallback xmlns="">
       <p:transition>
         <p:fade/>
       </p:transition>
@@ -4216,7 +4451,6 @@
               <a:rPr lang="en-US"/>
               <a:t>Click to edit Master title style</a:t>
             </a:r>
-            <a:endParaRPr lang="en-US"/>
           </a:p>
         </p:txBody>
       </p:sp>
@@ -4250,7 +4484,6 @@
               <a:rPr lang="en-US"/>
               <a:t>Click to edit Master text styles</a:t>
             </a:r>
-            <a:endParaRPr lang="en-US"/>
           </a:p>
           <a:p>
             <a:pPr lvl="1"/>
@@ -4258,7 +4491,6 @@
               <a:rPr lang="en-US"/>
               <a:t>Second level</a:t>
             </a:r>
-            <a:endParaRPr lang="en-US"/>
           </a:p>
           <a:p>
             <a:pPr lvl="2"/>
@@ -4266,7 +4498,6 @@
               <a:rPr lang="en-US"/>
               <a:t>Third level</a:t>
             </a:r>
-            <a:endParaRPr lang="en-US"/>
           </a:p>
           <a:p>
             <a:pPr lvl="3"/>
@@ -4274,7 +4505,6 @@
               <a:rPr lang="en-US"/>
               <a:t>Fourth level</a:t>
             </a:r>
-            <a:endParaRPr lang="en-US"/>
           </a:p>
           <a:p>
             <a:pPr lvl="4"/>
@@ -4282,7 +4512,6 @@
               <a:rPr lang="en-US"/>
               <a:t>Fifth level</a:t>
             </a:r>
-            <a:endParaRPr lang="en-US"/>
           </a:p>
         </p:txBody>
       </p:sp>
@@ -4321,6 +4550,7 @@
           <a:p>
             <a:fld id="{5F1F6629-F5FD-422B-A222-E9DBAF0EEAD1}" type="datetimeFigureOut">
               <a:rPr lang="en-US" smtClean="0"/>
+              <a:t>5/12/2026</a:t>
             </a:fld>
             <a:endParaRPr lang="en-US"/>
           </a:p>
@@ -4407,6 +4637,7 @@
             </a:pPr>
             <a:fld id="{00000000-1234-1234-1234-123412341234}" type="slidenum">
               <a:rPr lang="en-US" smtClean="0"/>
+              <a:t>‹#›</a:t>
             </a:fld>
             <a:endParaRPr lang="en-US"/>
           </a:p>
@@ -4431,11 +4662,11 @@
   </p:sldLayoutIdLst>
   <mc:AlternateContent xmlns:mc="http://schemas.openxmlformats.org/markup-compatibility/2006" xmlns:p159="http://schemas.microsoft.com/office/powerpoint/2015/09/main">
     <mc:Choice Requires="p159">
-      <p:transition xmlns:p14="http://schemas.microsoft.com/office/powerpoint/2010/main">
+      <p:transition>
         <p159:morph option="byObject"/>
       </p:transition>
     </mc:Choice>
-    <mc:Fallback>
+    <mc:Fallback xmlns="">
       <p:transition>
         <p:fade/>
       </p:transition>
@@ -4731,7 +4962,7 @@
     <p:bg>
       <p:bgPr>
         <a:blipFill dpi="0" rotWithShape="1">
-          <a:blip r:embed="rId1">
+          <a:blip r:embed="rId3">
             <a:lum/>
           </a:blip>
           <a:srcRect/>
@@ -4809,10 +5040,10 @@
                   <a:solidFill>
                     <a:schemeClr val="lt1"/>
                   </a:solidFill>
-                  <a:latin typeface="Times New Roman" panose="02020603050405020304"/>
-                  <a:ea typeface="Times New Roman" panose="02020603050405020304"/>
-                  <a:cs typeface="Times New Roman" panose="02020603050405020304"/>
-                  <a:sym typeface="Times New Roman" panose="02020603050405020304"/>
+                  <a:latin typeface="Calibri" panose="020F0502020204030204"/>
+                  <a:ea typeface="Calibri" panose="020F0502020204030204"/>
+                  <a:cs typeface="Calibri" panose="020F0502020204030204"/>
+                  <a:sym typeface="Calibri" panose="020F0502020204030204"/>
                 </a:rPr>
                 <a:t>Bài Thuyết trình môn HT&amp;CN Web</a:t>
               </a:r>
@@ -4820,10 +5051,10 @@
                 <a:solidFill>
                   <a:schemeClr val="lt1"/>
                 </a:solidFill>
-                <a:latin typeface="Times New Roman" panose="02020603050405020304"/>
-                <a:ea typeface="Times New Roman" panose="02020603050405020304"/>
-                <a:cs typeface="Times New Roman" panose="02020603050405020304"/>
-                <a:sym typeface="Times New Roman" panose="02020603050405020304"/>
+                <a:latin typeface="Calibri" panose="020F0502020204030204"/>
+                <a:ea typeface="Calibri" panose="020F0502020204030204"/>
+                <a:cs typeface="Calibri" panose="020F0502020204030204"/>
+                <a:sym typeface="Calibri" panose="020F0502020204030204"/>
               </a:endParaRPr>
             </a:p>
           </p:txBody>
@@ -4863,26 +5094,17 @@
                 <a:buNone/>
               </a:pPr>
               <a:r>
-                <a:rPr lang="en-US" sz="1050" b="1">
+                <a:rPr lang="en-US" sz="1400" b="1">
                   <a:solidFill>
                     <a:schemeClr val="lt1"/>
                   </a:solidFill>
-                  <a:latin typeface="Times New Roman" panose="02020603050405020304"/>
-                  <a:ea typeface="Times New Roman" panose="02020603050405020304"/>
-                  <a:cs typeface="Times New Roman" panose="02020603050405020304"/>
-                  <a:sym typeface="Times New Roman" panose="02020603050405020304"/>
+                  <a:latin typeface="Calibri" panose="020F0502020204030204"/>
+                  <a:ea typeface="Calibri" panose="020F0502020204030204"/>
+                  <a:cs typeface="Calibri" panose="020F0502020204030204"/>
+                  <a:sym typeface="Calibri" panose="020F0502020204030204"/>
                 </a:rPr>
-                <a:t>Giảng Viên Hướng Dẫn:Phạm Thanh Tùng</a:t>
+                <a:t>Giảng Viên Hướng Dẫn: Phạm Thanh Tùng</a:t>
               </a:r>
-              <a:endParaRPr lang="en-US" sz="1050" b="1">
-                <a:solidFill>
-                  <a:schemeClr val="lt1"/>
-                </a:solidFill>
-                <a:latin typeface="Times New Roman" panose="02020603050405020304"/>
-                <a:ea typeface="Times New Roman" panose="02020603050405020304"/>
-                <a:cs typeface="Times New Roman" panose="02020603050405020304"/>
-                <a:sym typeface="Times New Roman" panose="02020603050405020304"/>
-              </a:endParaRPr>
             </a:p>
             <a:p>
               <a:pPr marL="0" lvl="0" indent="0" algn="l" rtl="0">
@@ -4894,14 +5116,14 @@
                 </a:spcAft>
                 <a:buNone/>
               </a:pPr>
-              <a:endParaRPr sz="1050" b="1">
+              <a:endParaRPr sz="1400" b="1">
                 <a:solidFill>
                   <a:schemeClr val="lt1"/>
                 </a:solidFill>
-                <a:latin typeface="Times New Roman" panose="02020603050405020304"/>
-                <a:ea typeface="Times New Roman" panose="02020603050405020304"/>
-                <a:cs typeface="Times New Roman" panose="02020603050405020304"/>
-                <a:sym typeface="Times New Roman" panose="02020603050405020304"/>
+                <a:latin typeface="Calibri" panose="020F0502020204030204"/>
+                <a:ea typeface="Calibri" panose="020F0502020204030204"/>
+                <a:cs typeface="Calibri" panose="020F0502020204030204"/>
+                <a:sym typeface="Calibri" panose="020F0502020204030204"/>
               </a:endParaRPr>
             </a:p>
           </p:txBody>
@@ -4966,22 +5188,15 @@
           <a:p>
             <a:pPr algn="ctr"/>
             <a:r>
-              <a:rPr lang="en-US" sz="3600" b="1">
+              <a:rPr lang="vi-VN" sz="3600" b="1">
                 <a:solidFill>
                   <a:schemeClr val="bg1"/>
                 </a:solidFill>
-                <a:latin typeface="Times New Roman" panose="02020603050405020304" pitchFamily="18" charset="0"/>
-                <a:cs typeface="Times New Roman" panose="02020603050405020304" pitchFamily="18" charset="0"/>
+                <a:latin typeface="Calibri" panose="020F0502020204030204" pitchFamily="34" charset="0"/>
+                <a:cs typeface="Calibri" panose="020F0502020204030204" pitchFamily="34" charset="0"/>
               </a:rPr>
-              <a:t>Đề Tài : Thiết Kế Và Xây Dựng Website Bán Loa</a:t>
-            </a:r>
-            <a:endParaRPr lang="en-US" sz="3600" b="1">
-              <a:solidFill>
-                <a:schemeClr val="bg1"/>
-              </a:solidFill>
-              <a:latin typeface="Times New Roman" panose="02020603050405020304" pitchFamily="18" charset="0"/>
-              <a:cs typeface="Times New Roman" panose="02020603050405020304" pitchFamily="18" charset="0"/>
-            </a:endParaRPr>
+              <a:t>Thiết Kế Và Xây Dựng Website Bán Loa</a:t>
+            </a:r>
           </a:p>
         </p:txBody>
       </p:sp>
@@ -4990,11 +5205,11 @@
   <p:clrMapOvr>
     <a:masterClrMapping/>
   </p:clrMapOvr>
-  <mc:AlternateContent xmlns:mc="http://schemas.openxmlformats.org/markup-compatibility/2006">
-    <mc:Choice xmlns:p14="http://schemas.microsoft.com/office/powerpoint/2010/main" Requires="p14">
+  <mc:AlternateContent xmlns:mc="http://schemas.openxmlformats.org/markup-compatibility/2006" xmlns:p14="http://schemas.microsoft.com/office/powerpoint/2010/main">
+    <mc:Choice Requires="p14">
       <p:transition p14:dur="0"/>
     </mc:Choice>
-    <mc:Fallback>
+    <mc:Fallback xmlns="">
       <p:transition/>
     </mc:Fallback>
   </mc:AlternateContent>
@@ -5007,7 +5222,7 @@
     <p:bg>
       <p:bgPr>
         <a:blipFill dpi="0" rotWithShape="1">
-          <a:blip r:embed="rId1">
+          <a:blip r:embed="rId3">
             <a:lum/>
           </a:blip>
           <a:srcRect/>
@@ -5040,7 +5255,7 @@
         </p:nvGrpSpPr>
         <p:grpSpPr>
           <a:xfrm>
-            <a:off x="-3768155" y="4154760"/>
+            <a:off x="125665" y="4154760"/>
             <a:ext cx="4111800" cy="897300"/>
             <a:chOff x="121014" y="3109453"/>
             <a:chExt cx="4111800" cy="897300"/>
@@ -5085,21 +5300,21 @@
                   <a:solidFill>
                     <a:schemeClr val="lt1"/>
                   </a:solidFill>
-                  <a:latin typeface="Times New Roman" panose="02020603050405020304"/>
-                  <a:ea typeface="Times New Roman" panose="02020603050405020304"/>
-                  <a:cs typeface="Times New Roman" panose="02020603050405020304"/>
-                  <a:sym typeface="Times New Roman" panose="02020603050405020304"/>
+                  <a:latin typeface="Calibri" panose="02020603050405020304"/>
+                  <a:ea typeface="Calibri" panose="02020603050405020304"/>
+                  <a:cs typeface="Calibri" panose="02020603050405020304"/>
+                  <a:sym typeface="Calibri" panose="02020603050405020304"/>
                 </a:rPr>
-                <a:t>Bài Thuyết trình môn PLDC</a:t>
+                <a:t>Bài Thuyết Trình Môn HT&amp;CN Web</a:t>
               </a:r>
               <a:endParaRPr sz="1800" b="1">
                 <a:solidFill>
                   <a:schemeClr val="lt1"/>
                 </a:solidFill>
-                <a:latin typeface="Times New Roman" panose="02020603050405020304"/>
-                <a:ea typeface="Times New Roman" panose="02020603050405020304"/>
-                <a:cs typeface="Times New Roman" panose="02020603050405020304"/>
-                <a:sym typeface="Times New Roman" panose="02020603050405020304"/>
+                <a:latin typeface="Calibri" panose="02020603050405020304"/>
+                <a:ea typeface="Calibri" panose="02020603050405020304"/>
+                <a:cs typeface="Calibri" panose="02020603050405020304"/>
+                <a:sym typeface="Calibri" panose="02020603050405020304"/>
               </a:endParaRPr>
             </a:p>
           </p:txBody>
@@ -5139,26 +5354,17 @@
                 <a:buNone/>
               </a:pPr>
               <a:r>
-                <a:rPr lang="en-US" sz="1050" b="1">
+                <a:rPr lang="en-US" sz="1400" b="1">
                   <a:solidFill>
                     <a:schemeClr val="lt1"/>
                   </a:solidFill>
-                  <a:latin typeface="Times New Roman" panose="02020603050405020304"/>
-                  <a:ea typeface="Times New Roman" panose="02020603050405020304"/>
-                  <a:cs typeface="Times New Roman" panose="02020603050405020304"/>
-                  <a:sym typeface="Times New Roman" panose="02020603050405020304"/>
+                  <a:latin typeface="Calibri" panose="02020603050405020304"/>
+                  <a:ea typeface="Calibri" panose="02020603050405020304"/>
+                  <a:cs typeface="Calibri" panose="02020603050405020304"/>
+                  <a:sym typeface="Calibri" panose="02020603050405020304"/>
                 </a:rPr>
-                <a:t>Giảng Viên Hướng Dẫn: Nguyễn Thành Minh Chánh</a:t>
+                <a:t>Giảng Viên Hướng Dẫn: Phạm Thanh Tùng</a:t>
               </a:r>
-              <a:endParaRPr lang="en-US" sz="1050" b="1">
-                <a:solidFill>
-                  <a:schemeClr val="lt1"/>
-                </a:solidFill>
-                <a:latin typeface="Times New Roman" panose="02020603050405020304"/>
-                <a:ea typeface="Times New Roman" panose="02020603050405020304"/>
-                <a:cs typeface="Times New Roman" panose="02020603050405020304"/>
-                <a:sym typeface="Times New Roman" panose="02020603050405020304"/>
-              </a:endParaRPr>
             </a:p>
             <a:p>
               <a:pPr marL="0" lvl="0" indent="0" algn="l" rtl="0">
@@ -5170,14 +5376,14 @@
                 </a:spcAft>
                 <a:buNone/>
               </a:pPr>
-              <a:endParaRPr sz="1050" b="1">
+              <a:endParaRPr sz="1400" b="1">
                 <a:solidFill>
                   <a:schemeClr val="lt1"/>
                 </a:solidFill>
-                <a:latin typeface="Times New Roman" panose="02020603050405020304"/>
-                <a:ea typeface="Times New Roman" panose="02020603050405020304"/>
-                <a:cs typeface="Times New Roman" panose="02020603050405020304"/>
-                <a:sym typeface="Times New Roman" panose="02020603050405020304"/>
+                <a:latin typeface="Calibri" panose="02020603050405020304"/>
+                <a:ea typeface="Calibri" panose="02020603050405020304"/>
+                <a:cs typeface="Calibri" panose="02020603050405020304"/>
+                <a:sym typeface="Calibri" panose="02020603050405020304"/>
               </a:endParaRPr>
             </a:p>
           </p:txBody>
@@ -5227,7 +5433,7 @@
         <p:spPr>
           <a:xfrm>
             <a:off x="2941320" y="1646290"/>
-            <a:ext cx="4373880" cy="369332"/>
+            <a:ext cx="4373880" cy="461665"/>
           </a:xfrm>
           <a:prstGeom prst="rect">
             <a:avLst/>
@@ -5241,22 +5447,15 @@
           <a:lstStyle/>
           <a:p>
             <a:r>
-              <a:rPr lang="en-US">
+              <a:rPr lang="en-US" sz="2400" b="1">
                 <a:solidFill>
                   <a:schemeClr val="bg1"/>
                 </a:solidFill>
-                <a:latin typeface="Times New Roman" panose="02020603050405020304" pitchFamily="18" charset="0"/>
-                <a:cs typeface="Times New Roman" panose="02020603050405020304" pitchFamily="18" charset="0"/>
+                <a:latin typeface="Calibri" panose="02020603050405020304" pitchFamily="18" charset="0"/>
+                <a:cs typeface="Calibri" panose="02020603050405020304" pitchFamily="18" charset="0"/>
               </a:rPr>
               <a:t>DANH SÁCH THÀNH VIÊN :</a:t>
             </a:r>
-            <a:endParaRPr lang="en-US">
-              <a:solidFill>
-                <a:schemeClr val="bg1"/>
-              </a:solidFill>
-              <a:latin typeface="Times New Roman" panose="02020603050405020304" pitchFamily="18" charset="0"/>
-              <a:cs typeface="Times New Roman" panose="02020603050405020304" pitchFamily="18" charset="0"/>
-            </a:endParaRPr>
           </a:p>
         </p:txBody>
       </p:sp>
@@ -5287,18 +5486,11 @@
                 <a:solidFill>
                   <a:schemeClr val="bg1"/>
                 </a:solidFill>
-                <a:latin typeface="Times New Roman" panose="02020603050405020304" pitchFamily="18" charset="0"/>
-                <a:cs typeface="Times New Roman" panose="02020603050405020304" pitchFamily="18" charset="0"/>
+                <a:latin typeface="Calibri" panose="02020603050405020304" pitchFamily="18" charset="0"/>
+                <a:cs typeface="Calibri" panose="02020603050405020304" pitchFamily="18" charset="0"/>
               </a:rPr>
               <a:t>24652241 - Lê Văn Gia Bảo</a:t>
             </a:r>
-            <a:endParaRPr lang="en-US">
-              <a:solidFill>
-                <a:schemeClr val="bg1"/>
-              </a:solidFill>
-              <a:latin typeface="Times New Roman" panose="02020603050405020304" pitchFamily="18" charset="0"/>
-              <a:cs typeface="Times New Roman" panose="02020603050405020304" pitchFamily="18" charset="0"/>
-            </a:endParaRPr>
           </a:p>
           <a:p>
             <a:r>
@@ -5306,18 +5498,11 @@
                 <a:solidFill>
                   <a:schemeClr val="bg1"/>
                 </a:solidFill>
-                <a:latin typeface="Times New Roman" panose="02020603050405020304" pitchFamily="18" charset="0"/>
-                <a:cs typeface="Times New Roman" panose="02020603050405020304" pitchFamily="18" charset="0"/>
+                <a:latin typeface="Calibri" panose="02020603050405020304" pitchFamily="18" charset="0"/>
+                <a:cs typeface="Calibri" panose="02020603050405020304" pitchFamily="18" charset="0"/>
               </a:rPr>
               <a:t>24650021 - Vũ Quang Hào</a:t>
             </a:r>
-            <a:endParaRPr lang="en-US">
-              <a:solidFill>
-                <a:schemeClr val="bg1"/>
-              </a:solidFill>
-              <a:latin typeface="Times New Roman" panose="02020603050405020304" pitchFamily="18" charset="0"/>
-              <a:cs typeface="Times New Roman" panose="02020603050405020304" pitchFamily="18" charset="0"/>
-            </a:endParaRPr>
           </a:p>
           <a:p>
             <a:r>
@@ -5325,18 +5510,11 @@
                 <a:solidFill>
                   <a:schemeClr val="bg1"/>
                 </a:solidFill>
-                <a:latin typeface="Times New Roman" panose="02020603050405020304" pitchFamily="18" charset="0"/>
-                <a:cs typeface="Times New Roman" panose="02020603050405020304" pitchFamily="18" charset="0"/>
+                <a:latin typeface="Calibri" panose="02020603050405020304" pitchFamily="18" charset="0"/>
+                <a:cs typeface="Calibri" panose="02020603050405020304" pitchFamily="18" charset="0"/>
               </a:rPr>
               <a:t>24655751 - Tạ Tô Hầu Hân</a:t>
             </a:r>
-            <a:endParaRPr lang="en-US">
-              <a:solidFill>
-                <a:schemeClr val="bg1"/>
-              </a:solidFill>
-              <a:latin typeface="Times New Roman" panose="02020603050405020304" pitchFamily="18" charset="0"/>
-              <a:cs typeface="Times New Roman" panose="02020603050405020304" pitchFamily="18" charset="0"/>
-            </a:endParaRPr>
           </a:p>
           <a:p>
             <a:r>
@@ -5344,18 +5522,11 @@
                 <a:solidFill>
                   <a:schemeClr val="bg1"/>
                 </a:solidFill>
-                <a:latin typeface="Times New Roman" panose="02020603050405020304" pitchFamily="18" charset="0"/>
-                <a:cs typeface="Times New Roman" panose="02020603050405020304" pitchFamily="18" charset="0"/>
+                <a:latin typeface="Calibri" panose="02020603050405020304" pitchFamily="18" charset="0"/>
+                <a:cs typeface="Calibri" panose="02020603050405020304" pitchFamily="18" charset="0"/>
               </a:rPr>
               <a:t>24645481 - Nguyễn Đức Hậu</a:t>
             </a:r>
-            <a:endParaRPr lang="en-US">
-              <a:solidFill>
-                <a:schemeClr val="bg1"/>
-              </a:solidFill>
-              <a:latin typeface="Times New Roman" panose="02020603050405020304" pitchFamily="18" charset="0"/>
-              <a:cs typeface="Times New Roman" panose="02020603050405020304" pitchFamily="18" charset="0"/>
-            </a:endParaRPr>
           </a:p>
           <a:p>
             <a:r>
@@ -5363,8 +5534,8 @@
                 <a:solidFill>
                   <a:schemeClr val="bg1"/>
                 </a:solidFill>
-                <a:latin typeface="Times New Roman" panose="02020603050405020304" pitchFamily="18" charset="0"/>
-                <a:cs typeface="Times New Roman" panose="02020603050405020304" pitchFamily="18" charset="0"/>
+                <a:latin typeface="Calibri" panose="02020603050405020304" pitchFamily="18" charset="0"/>
+                <a:cs typeface="Calibri" panose="02020603050405020304" pitchFamily="18" charset="0"/>
               </a:rPr>
               <a:t>24747851</a:t>
             </a:r>
@@ -5373,8 +5544,8 @@
                 <a:solidFill>
                   <a:schemeClr val="bg1"/>
                 </a:solidFill>
-                <a:latin typeface="Times New Roman" panose="02020603050405020304" pitchFamily="18" charset="0"/>
-                <a:cs typeface="Times New Roman" panose="02020603050405020304" pitchFamily="18" charset="0"/>
+                <a:latin typeface="Calibri" panose="02020603050405020304" pitchFamily="18" charset="0"/>
+                <a:cs typeface="Calibri" panose="02020603050405020304" pitchFamily="18" charset="0"/>
               </a:rPr>
               <a:t> - Ng</a:t>
             </a:r>
@@ -5383,28 +5554,11 @@
                 <a:solidFill>
                   <a:schemeClr val="bg1"/>
                 </a:solidFill>
-                <a:latin typeface="Times New Roman" panose="02020603050405020304" pitchFamily="18" charset="0"/>
-                <a:cs typeface="Times New Roman" panose="02020603050405020304" pitchFamily="18" charset="0"/>
+                <a:latin typeface="Calibri" panose="02020603050405020304" pitchFamily="18" charset="0"/>
+                <a:cs typeface="Calibri" panose="02020603050405020304" pitchFamily="18" charset="0"/>
               </a:rPr>
-              <a:t>uyễn Văn </a:t>
-            </a:r>
-            <a:r>
-              <a:rPr lang="vi-VN" altLang="en-US">
-                <a:solidFill>
-                  <a:schemeClr val="bg1"/>
-                </a:solidFill>
-                <a:latin typeface="Times New Roman" panose="02020603050405020304" pitchFamily="18" charset="0"/>
-                <a:cs typeface="Times New Roman" panose="02020603050405020304" pitchFamily="18" charset="0"/>
-              </a:rPr>
-              <a:t>Hòa</a:t>
-            </a:r>
-            <a:endParaRPr lang="vi-VN" altLang="en-US">
-              <a:solidFill>
-                <a:schemeClr val="bg1"/>
-              </a:solidFill>
-              <a:latin typeface="Times New Roman" panose="02020603050405020304" pitchFamily="18" charset="0"/>
-              <a:cs typeface="Times New Roman" panose="02020603050405020304" pitchFamily="18" charset="0"/>
-            </a:endParaRPr>
+              <a:t>uyễn Văn Hòa</a:t>
+            </a:r>
           </a:p>
         </p:txBody>
       </p:sp>
@@ -5415,11 +5569,11 @@
   </p:clrMapOvr>
   <mc:AlternateContent xmlns:mc="http://schemas.openxmlformats.org/markup-compatibility/2006" xmlns:p159="http://schemas.microsoft.com/office/powerpoint/2015/09/main">
     <mc:Choice Requires="p159">
-      <p:transition xmlns:p14="http://schemas.microsoft.com/office/powerpoint/2010/main">
+      <p:transition>
         <p159:morph option="byObject"/>
       </p:transition>
     </mc:Choice>
-    <mc:Fallback>
+    <mc:Fallback xmlns="">
       <p:transition>
         <p:fade/>
       </p:transition>
@@ -5572,14 +5726,14 @@
       </p:grpSpPr>
       <p:pic>
         <p:nvPicPr>
-          <p:cNvPr id="16" name="Picture 15" descr="A black rectangle with white text&#10;&#10;AI-generated content may be incorrect."/>
+          <p:cNvPr id="16" name="Picture 15" descr="A black rectangle with white text  AI-generated content may be incorrect."/>
           <p:cNvPicPr>
             <a:picLocks noChangeAspect="1"/>
           </p:cNvPicPr>
           <p:nvPr/>
         </p:nvPicPr>
         <p:blipFill>
-          <a:blip r:embed="rId1"/>
+          <a:blip r:embed="rId3"/>
           <a:stretch>
             <a:fillRect/>
           </a:stretch>
@@ -5627,33 +5781,24 @@
                 <a:spcPts val="0"/>
               </a:spcAft>
               <a:buClr>
-                <a:srgbClr val="1155CC"/>
+                <a:schemeClr val="bg1"/>
               </a:buClr>
               <a:buSzPts val="2300"/>
-              <a:buFont typeface="Times New Roman" panose="02020603050405020304"/>
+              <a:buFont typeface="Calibri" panose="02020603050405020304"/>
               <a:buAutoNum type="romanUcPeriod"/>
             </a:pPr>
             <a:r>
               <a:rPr lang="en-US" sz="2300" b="1">
                 <a:solidFill>
-                  <a:srgbClr val="1155CC"/>
+                  <a:schemeClr val="bg1"/>
                 </a:solidFill>
-                <a:latin typeface="Times New Roman" panose="02020603050405020304"/>
-                <a:ea typeface="Times New Roman" panose="02020603050405020304"/>
-                <a:cs typeface="Times New Roman" panose="02020603050405020304"/>
-                <a:sym typeface="Times New Roman" panose="02020603050405020304"/>
+                <a:latin typeface="Calibri" panose="02020603050405020304"/>
+                <a:ea typeface="Calibri" panose="02020603050405020304"/>
+                <a:cs typeface="Calibri" panose="02020603050405020304"/>
+                <a:sym typeface="Calibri" panose="02020603050405020304"/>
               </a:rPr>
               <a:t>Thực Trạng &amp; Vấn Đề Hiện Tại</a:t>
             </a:r>
-            <a:endParaRPr sz="2300" b="1">
-              <a:solidFill>
-                <a:srgbClr val="1155CC"/>
-              </a:solidFill>
-              <a:latin typeface="Times New Roman" panose="02020603050405020304"/>
-              <a:ea typeface="Times New Roman" panose="02020603050405020304"/>
-              <a:cs typeface="Times New Roman" panose="02020603050405020304"/>
-              <a:sym typeface="Times New Roman" panose="02020603050405020304"/>
-            </a:endParaRPr>
           </a:p>
         </p:txBody>
       </p:sp>
@@ -5666,7 +5811,7 @@
         <p:spPr>
           <a:xfrm>
             <a:off x="1256370" y="1417588"/>
-            <a:ext cx="6631259" cy="2308324"/>
+            <a:ext cx="6631259" cy="1938992"/>
           </a:xfrm>
           <a:prstGeom prst="rect">
             <a:avLst/>
@@ -5684,8 +5829,8 @@
                 <a:solidFill>
                   <a:schemeClr val="bg1"/>
                 </a:solidFill>
-                <a:latin typeface="Times New Roman" panose="02020603050405020304" pitchFamily="18" charset="0"/>
-                <a:cs typeface="Times New Roman" panose="02020603050405020304" pitchFamily="18" charset="0"/>
+                <a:latin typeface="Calibri" panose="02020603050405020304" pitchFamily="18" charset="0"/>
+                <a:cs typeface="Calibri" panose="02020603050405020304" pitchFamily="18" charset="0"/>
               </a:rPr>
               <a:t>-</a:t>
             </a:r>
@@ -5694,8 +5839,8 @@
                 <a:solidFill>
                   <a:schemeClr val="bg1"/>
                 </a:solidFill>
-                <a:latin typeface="Times New Roman" panose="02020603050405020304" pitchFamily="18" charset="0"/>
-                <a:cs typeface="Times New Roman" panose="02020603050405020304" pitchFamily="18" charset="0"/>
+                <a:latin typeface="Calibri" panose="02020603050405020304" pitchFamily="18" charset="0"/>
+                <a:cs typeface="Calibri" panose="02020603050405020304" pitchFamily="18" charset="0"/>
               </a:rPr>
               <a:t>Thị trường:</a:t>
             </a:r>
@@ -5704,8 +5849,8 @@
                 <a:solidFill>
                   <a:schemeClr val="bg1"/>
                 </a:solidFill>
-                <a:latin typeface="Times New Roman" panose="02020603050405020304" pitchFamily="18" charset="0"/>
-                <a:cs typeface="Times New Roman" panose="02020603050405020304" pitchFamily="18" charset="0"/>
+                <a:latin typeface="Calibri" panose="02020603050405020304" pitchFamily="18" charset="0"/>
+                <a:cs typeface="Calibri" panose="02020603050405020304" pitchFamily="18" charset="0"/>
               </a:rPr>
               <a:t> Nhu cầu thiết bị âm thanh (loa Bluetooth, loa kiểm âm, soundbar) tăng cao nhưng khách hàng khó so sánh thông số kỹ thuật.</a:t>
             </a:r>
@@ -5713,8 +5858,8 @@
               <a:solidFill>
                 <a:schemeClr val="bg1"/>
               </a:solidFill>
-              <a:latin typeface="Times New Roman" panose="02020603050405020304" pitchFamily="18" charset="0"/>
-              <a:cs typeface="Times New Roman" panose="02020603050405020304" pitchFamily="18" charset="0"/>
+              <a:latin typeface="Calibri" panose="02020603050405020304" pitchFamily="18" charset="0"/>
+              <a:cs typeface="Calibri" panose="02020603050405020304" pitchFamily="18" charset="0"/>
             </a:endParaRPr>
           </a:p>
           <a:p>
@@ -5723,8 +5868,8 @@
                 <a:solidFill>
                   <a:schemeClr val="bg1"/>
                 </a:solidFill>
-                <a:latin typeface="Times New Roman" panose="02020603050405020304" pitchFamily="18" charset="0"/>
-                <a:cs typeface="Times New Roman" panose="02020603050405020304" pitchFamily="18" charset="0"/>
+                <a:latin typeface="Calibri" panose="02020603050405020304" pitchFamily="18" charset="0"/>
+                <a:cs typeface="Calibri" panose="02020603050405020304" pitchFamily="18" charset="0"/>
               </a:rPr>
               <a:t>-</a:t>
             </a:r>
@@ -5733,8 +5878,8 @@
                 <a:solidFill>
                   <a:schemeClr val="bg1"/>
                 </a:solidFill>
-                <a:latin typeface="Times New Roman" panose="02020603050405020304" pitchFamily="18" charset="0"/>
-                <a:cs typeface="Times New Roman" panose="02020603050405020304" pitchFamily="18" charset="0"/>
+                <a:latin typeface="Calibri" panose="02020603050405020304" pitchFamily="18" charset="0"/>
+                <a:cs typeface="Calibri" panose="02020603050405020304" pitchFamily="18" charset="0"/>
               </a:rPr>
               <a:t>Trải nghiệm người dùng:</a:t>
             </a:r>
@@ -5743,17 +5888,17 @@
                 <a:solidFill>
                   <a:schemeClr val="bg1"/>
                 </a:solidFill>
-                <a:latin typeface="Times New Roman" panose="02020603050405020304" pitchFamily="18" charset="0"/>
-                <a:cs typeface="Times New Roman" panose="02020603050405020304" pitchFamily="18" charset="0"/>
+                <a:latin typeface="Calibri" panose="02020603050405020304" pitchFamily="18" charset="0"/>
+                <a:cs typeface="Calibri" panose="02020603050405020304" pitchFamily="18" charset="0"/>
               </a:rPr>
               <a:t> Nhiều trang web hiện nay có giao diện quá cũ kỹ, không tối ưu trên điện thoại</a:t>
             </a:r>
-            <a:endParaRPr lang="vi-VN" sz="2400">
+            <a:endParaRPr lang="en-US" sz="2400">
               <a:solidFill>
                 <a:schemeClr val="bg1"/>
               </a:solidFill>
-              <a:latin typeface="Times New Roman" panose="02020603050405020304" pitchFamily="18" charset="0"/>
-              <a:cs typeface="Times New Roman" panose="02020603050405020304" pitchFamily="18" charset="0"/>
+              <a:latin typeface="Calibri" panose="02020603050405020304" pitchFamily="18" charset="0"/>
+              <a:cs typeface="Calibri" panose="02020603050405020304" pitchFamily="18" charset="0"/>
             </a:endParaRPr>
           </a:p>
         </p:txBody>
@@ -5763,13 +5908,13 @@
   <p:clrMapOvr>
     <a:masterClrMapping/>
   </p:clrMapOvr>
-  <mc:AlternateContent xmlns:mc="http://schemas.openxmlformats.org/markup-compatibility/2006">
-    <mc:Choice xmlns:p14="http://schemas.microsoft.com/office/powerpoint/2010/main" Requires="p14">
+  <mc:AlternateContent xmlns:mc="http://schemas.openxmlformats.org/markup-compatibility/2006" xmlns:p14="http://schemas.microsoft.com/office/powerpoint/2010/main">
+    <mc:Choice Requires="p14">
       <p:transition p14:dur="250">
         <p:wipe/>
       </p:transition>
     </mc:Choice>
-    <mc:Fallback>
+    <mc:Fallback xmlns="">
       <p:transition>
         <p:wipe/>
       </p:transition>
@@ -5797,14 +5942,14 @@
       </p:grpSpPr>
       <p:pic>
         <p:nvPicPr>
-          <p:cNvPr id="16" name="Picture 15" descr="A black rectangle with white text&#10;&#10;AI-generated content may be incorrect."/>
+          <p:cNvPr id="16" name="Picture 15" descr="A black rectangle with white text  AI-generated content may be incorrect."/>
           <p:cNvPicPr>
             <a:picLocks noChangeAspect="1"/>
           </p:cNvPicPr>
           <p:nvPr/>
         </p:nvPicPr>
         <p:blipFill>
-          <a:blip r:embed="rId1"/>
+          <a:blip r:embed="rId3"/>
           <a:stretch>
             <a:fillRect/>
           </a:stretch>
@@ -5852,31 +5997,22 @@
                 <a:spcPts val="0"/>
               </a:spcAft>
               <a:buClr>
-                <a:srgbClr val="1155CC"/>
+                <a:schemeClr val="bg1"/>
               </a:buClr>
               <a:buSzPts val="2300"/>
             </a:pPr>
             <a:r>
               <a:rPr lang="en-US" sz="2300" b="1">
                 <a:solidFill>
-                  <a:srgbClr val="1155CC"/>
+                  <a:schemeClr val="bg1"/>
                 </a:solidFill>
-                <a:latin typeface="Times New Roman" panose="02020603050405020304"/>
-                <a:ea typeface="Times New Roman" panose="02020603050405020304"/>
-                <a:cs typeface="Times New Roman" panose="02020603050405020304"/>
-                <a:sym typeface="Times New Roman" panose="02020603050405020304"/>
+                <a:latin typeface="Calibri" panose="02020603050405020304"/>
+                <a:ea typeface="Calibri" panose="02020603050405020304"/>
+                <a:cs typeface="Calibri" panose="02020603050405020304"/>
+                <a:sym typeface="Calibri" panose="02020603050405020304"/>
               </a:rPr>
               <a:t>II. Lý Do Chọn Đề Tài</a:t>
             </a:r>
-            <a:endParaRPr sz="2300" b="1">
-              <a:solidFill>
-                <a:srgbClr val="1155CC"/>
-              </a:solidFill>
-              <a:latin typeface="Times New Roman" panose="02020603050405020304"/>
-              <a:ea typeface="Times New Roman" panose="02020603050405020304"/>
-              <a:cs typeface="Times New Roman" panose="02020603050405020304"/>
-              <a:sym typeface="Times New Roman" panose="02020603050405020304"/>
-            </a:endParaRPr>
           </a:p>
         </p:txBody>
       </p:sp>
@@ -5920,12 +6056,12 @@
               </a:rPr>
               <a:t>Đề tài được xác định thông qua phương thức bốc thăm tập trung. Tuy là một sự lựa chọn ngẫu nhiên, nhưng trang web bán sản phẩm công nghệ như loa lại rất phù hợp để triển khai các kỹ thuật Frontend hiện đại (như Flexbox và Grid), giúp tối ưu hóa việc trưng bày sản phẩm theo lưới, đúng với mục tiêu học tập và rèn luyện kỹ năng của tôi.</a:t>
             </a:r>
-            <a:endParaRPr lang="vi-VN" sz="2000">
+            <a:endParaRPr lang="en-US" sz="2000">
               <a:solidFill>
                 <a:schemeClr val="bg1"/>
               </a:solidFill>
               <a:latin typeface="+mj-lt"/>
-              <a:cs typeface="Times New Roman" panose="02020603050405020304" pitchFamily="18" charset="0"/>
+              <a:cs typeface="Calibri" panose="02020603050405020304" pitchFamily="18" charset="0"/>
             </a:endParaRPr>
           </a:p>
         </p:txBody>
@@ -5935,13 +6071,13 @@
   <p:clrMapOvr>
     <a:masterClrMapping/>
   </p:clrMapOvr>
-  <mc:AlternateContent xmlns:mc="http://schemas.openxmlformats.org/markup-compatibility/2006">
-    <mc:Choice xmlns:p14="http://schemas.microsoft.com/office/powerpoint/2010/main" Requires="p14">
+  <mc:AlternateContent xmlns:mc="http://schemas.openxmlformats.org/markup-compatibility/2006" xmlns:p14="http://schemas.microsoft.com/office/powerpoint/2010/main">
+    <mc:Choice Requires="p14">
       <p:transition p14:dur="250">
         <p:wipe/>
       </p:transition>
     </mc:Choice>
-    <mc:Fallback>
+    <mc:Fallback xmlns="">
       <p:transition>
         <p:wipe/>
       </p:transition>
@@ -5969,14 +6105,14 @@
       </p:grpSpPr>
       <p:pic>
         <p:nvPicPr>
-          <p:cNvPr id="16" name="Picture 15" descr="A black rectangle with white text&#10;&#10;AI-generated content may be incorrect."/>
+          <p:cNvPr id="16" name="Picture 15" descr="A black rectangle with white text  AI-generated content may be incorrect."/>
           <p:cNvPicPr>
             <a:picLocks noChangeAspect="1"/>
           </p:cNvPicPr>
           <p:nvPr/>
         </p:nvPicPr>
         <p:blipFill>
-          <a:blip r:embed="rId1"/>
+          <a:blip r:embed="rId3"/>
           <a:stretch>
             <a:fillRect/>
           </a:stretch>
@@ -6024,31 +6160,22 @@
                 <a:spcPts val="0"/>
               </a:spcAft>
               <a:buClr>
-                <a:srgbClr val="1155CC"/>
+                <a:schemeClr val="bg1"/>
               </a:buClr>
               <a:buSzPts val="2300"/>
             </a:pPr>
             <a:r>
               <a:rPr lang="en-US" sz="2300" b="1">
                 <a:solidFill>
-                  <a:srgbClr val="1155CC"/>
+                  <a:schemeClr val="bg1"/>
                 </a:solidFill>
-                <a:latin typeface="Times New Roman" panose="02020603050405020304"/>
-                <a:ea typeface="Times New Roman" panose="02020603050405020304"/>
-                <a:cs typeface="Times New Roman" panose="02020603050405020304"/>
-                <a:sym typeface="Times New Roman" panose="02020603050405020304"/>
+                <a:latin typeface="Calibri" panose="02020603050405020304"/>
+                <a:ea typeface="Calibri" panose="02020603050405020304"/>
+                <a:cs typeface="Calibri" panose="02020603050405020304"/>
+                <a:sym typeface="Calibri" panose="02020603050405020304"/>
               </a:rPr>
               <a:t>III. Mô Tả Bài Toán :</a:t>
             </a:r>
-            <a:endParaRPr sz="2300" b="1">
-              <a:solidFill>
-                <a:srgbClr val="1155CC"/>
-              </a:solidFill>
-              <a:latin typeface="Times New Roman" panose="02020603050405020304"/>
-              <a:ea typeface="Times New Roman" panose="02020603050405020304"/>
-              <a:cs typeface="Times New Roman" panose="02020603050405020304"/>
-              <a:sym typeface="Times New Roman" panose="02020603050405020304"/>
-            </a:endParaRPr>
           </a:p>
         </p:txBody>
       </p:sp>
@@ -6079,8 +6206,8 @@
                 <a:solidFill>
                   <a:schemeClr val="bg1"/>
                 </a:solidFill>
-                <a:latin typeface="Times New Roman" panose="02020603050405020304" pitchFamily="18" charset="0"/>
-                <a:cs typeface="Times New Roman" panose="02020603050405020304" pitchFamily="18" charset="0"/>
+                <a:latin typeface="Calibri" panose="02020603050405020304" pitchFamily="18" charset="0"/>
+                <a:cs typeface="Calibri" panose="02020603050405020304" pitchFamily="18" charset="0"/>
               </a:rPr>
               <a:t>-</a:t>
             </a:r>
@@ -6089,8 +6216,8 @@
                 <a:solidFill>
                   <a:schemeClr val="bg1"/>
                 </a:solidFill>
-                <a:latin typeface="Times New Roman" panose="02020603050405020304" pitchFamily="18" charset="0"/>
-                <a:cs typeface="Times New Roman" panose="02020603050405020304" pitchFamily="18" charset="0"/>
+                <a:latin typeface="Calibri" panose="02020603050405020304" pitchFamily="18" charset="0"/>
+                <a:cs typeface="Calibri" panose="02020603050405020304" pitchFamily="18" charset="0"/>
               </a:rPr>
               <a:t>Xây dựng hệ thống mua bán loa trực tuyến trên website, giúp người dùng có thể dễ dàng đặt mua loa từ xa, qua đó giúp người bán có thể thu hút nhiều tệp khách hàng hơn.</a:t>
             </a:r>
@@ -6098,8 +6225,8 @@
               <a:solidFill>
                 <a:schemeClr val="bg1"/>
               </a:solidFill>
-              <a:latin typeface="Times New Roman" panose="02020603050405020304" pitchFamily="18" charset="0"/>
-              <a:cs typeface="Times New Roman" panose="02020603050405020304" pitchFamily="18" charset="0"/>
+              <a:latin typeface="Calibri" panose="02020603050405020304" pitchFamily="18" charset="0"/>
+              <a:cs typeface="Calibri" panose="02020603050405020304" pitchFamily="18" charset="0"/>
             </a:endParaRPr>
           </a:p>
           <a:p>
@@ -6107,8 +6234,8 @@
               <a:solidFill>
                 <a:schemeClr val="bg1"/>
               </a:solidFill>
-              <a:latin typeface="Times New Roman" panose="02020603050405020304" pitchFamily="18" charset="0"/>
-              <a:cs typeface="Times New Roman" panose="02020603050405020304" pitchFamily="18" charset="0"/>
+              <a:latin typeface="Calibri" panose="02020603050405020304" pitchFamily="18" charset="0"/>
+              <a:cs typeface="Calibri" panose="02020603050405020304" pitchFamily="18" charset="0"/>
             </a:endParaRPr>
           </a:p>
           <a:p>
@@ -6117,8 +6244,8 @@
                 <a:solidFill>
                   <a:schemeClr val="bg1"/>
                 </a:solidFill>
-                <a:latin typeface="Times New Roman" panose="02020603050405020304" pitchFamily="18" charset="0"/>
-                <a:cs typeface="Times New Roman" panose="02020603050405020304" pitchFamily="18" charset="0"/>
+                <a:latin typeface="Calibri" panose="02020603050405020304" pitchFamily="18" charset="0"/>
+                <a:cs typeface="Calibri" panose="02020603050405020304" pitchFamily="18" charset="0"/>
               </a:rPr>
               <a:t>-</a:t>
             </a:r>
@@ -6128,28 +6255,61 @@
                   <a:schemeClr val="bg1"/>
                 </a:solidFill>
                 <a:effectLst/>
-                <a:latin typeface="Times New Roman" panose="02020603050405020304" pitchFamily="18" charset="0"/>
-                <a:cs typeface="Times New Roman" panose="02020603050405020304" pitchFamily="18" charset="0"/>
+                <a:latin typeface="Calibri" panose="02020603050405020304" pitchFamily="18" charset="0"/>
+                <a:cs typeface="Calibri" panose="02020603050405020304" pitchFamily="18" charset="0"/>
               </a:rPr>
               <a:t>Hệ thống đảm bảo thông tin riêng của từng khách hàng qua hệ thống đăng nhập, khách hàng có thể xem sản phẩm bày bán qua các trang mô tả và tiến hành đặt hàng, thanh toán.</a:t>
             </a:r>
+          </a:p>
+          <a:p>
             <a:endParaRPr lang="en-US" sz="1400" b="0" i="0">
               <a:solidFill>
                 <a:schemeClr val="bg1"/>
               </a:solidFill>
               <a:effectLst/>
-              <a:latin typeface="Times New Roman" panose="02020603050405020304" pitchFamily="18" charset="0"/>
-              <a:cs typeface="Times New Roman" panose="02020603050405020304" pitchFamily="18" charset="0"/>
+              <a:latin typeface="Calibri" panose="02020603050405020304" pitchFamily="18" charset="0"/>
+              <a:cs typeface="Calibri" panose="02020603050405020304" pitchFamily="18" charset="0"/>
             </a:endParaRPr>
           </a:p>
           <a:p>
+            <a:r>
+              <a:rPr lang="en-US" sz="1400">
+                <a:solidFill>
+                  <a:schemeClr val="bg1"/>
+                </a:solidFill>
+                <a:latin typeface="Calibri" panose="02020603050405020304" pitchFamily="18" charset="0"/>
+                <a:cs typeface="Calibri" panose="02020603050405020304" pitchFamily="18" charset="0"/>
+              </a:rPr>
+              <a:t>-</a:t>
+            </a:r>
+            <a:r>
+              <a:rPr lang="vi-VN" sz="1400" b="0" i="0">
+                <a:solidFill>
+                  <a:schemeClr val="bg1"/>
+                </a:solidFill>
+                <a:effectLst/>
+                <a:latin typeface="Calibri" panose="02020603050405020304" pitchFamily="18" charset="0"/>
+                <a:cs typeface="Calibri" panose="02020603050405020304" pitchFamily="18" charset="0"/>
+              </a:rPr>
+              <a:t>Hệ thống có chức năng hiển thị mô tả danh sách sản phẩm được người bán quản lý, giá bán của các sản phẩm; lưu thông tin đăng nhập, phiên đăng nhập, của khách hàng, hóa đơn trực tuyến.</a:t>
+            </a:r>
             <a:endParaRPr lang="en-US" sz="1400" b="0" i="0">
               <a:solidFill>
                 <a:schemeClr val="bg1"/>
               </a:solidFill>
               <a:effectLst/>
-              <a:latin typeface="Times New Roman" panose="02020603050405020304" pitchFamily="18" charset="0"/>
-              <a:cs typeface="Times New Roman" panose="02020603050405020304" pitchFamily="18" charset="0"/>
+              <a:latin typeface="Calibri" panose="02020603050405020304" pitchFamily="18" charset="0"/>
+              <a:cs typeface="Calibri" panose="02020603050405020304" pitchFamily="18" charset="0"/>
+            </a:endParaRPr>
+          </a:p>
+          <a:p>
+            <a:endParaRPr lang="en-US" sz="1400" b="0" i="0">
+              <a:solidFill>
+                <a:schemeClr val="bg1"/>
+              </a:solidFill>
+              <a:effectLst/>
+              <a:latin typeface="Calibri" panose="02020603050405020304" pitchFamily="18" charset="0"/>
+              <a:cs typeface="Calibri" panose="02020603050405020304" pitchFamily="18" charset="0"/>
             </a:endParaRPr>
           </a:p>
           <a:p>
@@ -6158,8 +6318,8 @@
                 <a:solidFill>
                   <a:schemeClr val="bg1"/>
                 </a:solidFill>
-                <a:latin typeface="Times New Roman" panose="02020603050405020304" pitchFamily="18" charset="0"/>
-                <a:cs typeface="Times New Roman" panose="02020603050405020304" pitchFamily="18" charset="0"/>
+                <a:latin typeface="Calibri" panose="02020603050405020304" pitchFamily="18" charset="0"/>
+                <a:cs typeface="Calibri" panose="02020603050405020304" pitchFamily="18" charset="0"/>
               </a:rPr>
               <a:t>-</a:t>
             </a:r>
@@ -6169,18 +6329,18 @@
                   <a:schemeClr val="bg1"/>
                 </a:solidFill>
                 <a:effectLst/>
-                <a:latin typeface="Times New Roman" panose="02020603050405020304" pitchFamily="18" charset="0"/>
-                <a:cs typeface="Times New Roman" panose="02020603050405020304" pitchFamily="18" charset="0"/>
+                <a:latin typeface="Calibri" panose="02020603050405020304" pitchFamily="18" charset="0"/>
+                <a:cs typeface="Calibri" panose="02020603050405020304" pitchFamily="18" charset="0"/>
               </a:rPr>
-              <a:t>Hệ thống có chức năng hiển thị mô tả danh sách sản phẩm được người bán quản lý, giá bán của các sản phẩm; lưu thông tin đăng nhập, phiên đăng nhập, của khách hàng, hóa đơn trực tuyến.</a:t>
+              <a:t>Người quản lý có thể xem thông tin đơn hàng của khách hàng, thông tin cá nhân (địa chỉ, số điện thoại,...) được khách hàng cung cấp để tiến hành giao hàng, quản lý thông tin khách hàng thông qua lưu trữ của hệ thống. </a:t>
             </a:r>
             <a:endParaRPr lang="en-US" sz="1400" b="0" i="0">
               <a:solidFill>
                 <a:schemeClr val="bg1"/>
               </a:solidFill>
               <a:effectLst/>
-              <a:latin typeface="Times New Roman" panose="02020603050405020304" pitchFamily="18" charset="0"/>
-              <a:cs typeface="Times New Roman" panose="02020603050405020304" pitchFamily="18" charset="0"/>
+              <a:latin typeface="Calibri" panose="02020603050405020304" pitchFamily="18" charset="0"/>
+              <a:cs typeface="Calibri" panose="02020603050405020304" pitchFamily="18" charset="0"/>
             </a:endParaRPr>
           </a:p>
           <a:p>
@@ -6189,18 +6349,19 @@
                 <a:schemeClr val="bg1"/>
               </a:solidFill>
               <a:effectLst/>
-              <a:latin typeface="Times New Roman" panose="02020603050405020304" pitchFamily="18" charset="0"/>
-              <a:cs typeface="Times New Roman" panose="02020603050405020304" pitchFamily="18" charset="0"/>
+              <a:latin typeface="Calibri" panose="02020603050405020304" pitchFamily="18" charset="0"/>
+              <a:cs typeface="Calibri" panose="02020603050405020304" pitchFamily="18" charset="0"/>
             </a:endParaRPr>
           </a:p>
           <a:p>
             <a:r>
-              <a:rPr lang="en-US" sz="1400">
+              <a:rPr lang="en-US" sz="1400" b="0" i="0">
                 <a:solidFill>
                   <a:schemeClr val="bg1"/>
                 </a:solidFill>
-                <a:latin typeface="Times New Roman" panose="02020603050405020304" pitchFamily="18" charset="0"/>
-                <a:cs typeface="Times New Roman" panose="02020603050405020304" pitchFamily="18" charset="0"/>
+                <a:effectLst/>
+                <a:latin typeface="Calibri" panose="02020603050405020304" pitchFamily="18" charset="0"/>
+                <a:cs typeface="Calibri" panose="02020603050405020304" pitchFamily="18" charset="0"/>
               </a:rPr>
               <a:t>-</a:t>
             </a:r>
@@ -6210,60 +6371,18 @@
                   <a:schemeClr val="bg1"/>
                 </a:solidFill>
                 <a:effectLst/>
-                <a:latin typeface="Times New Roman" panose="02020603050405020304" pitchFamily="18" charset="0"/>
-                <a:cs typeface="Times New Roman" panose="02020603050405020304" pitchFamily="18" charset="0"/>
+                <a:latin typeface="Calibri" panose="02020603050405020304" pitchFamily="18" charset="0"/>
+                <a:cs typeface="Calibri" panose="02020603050405020304" pitchFamily="18" charset="0"/>
               </a:rPr>
-              <a:t>Người quản lý có thể xem thông tin đơn hàng của khách hàng, thông tin cá nhân (địa chỉ, số điện thoại,...) được khách hàng cung cấp để tiến hành giao hàng, quản lý thông tin khách hàng thông qua lưu trữ của hệ thống. </a:t>
+              <a:t>Hệ thống được thiết kế đơn giản, dễ dùng để người dùng có thể dễ dàng tiến hành đặt hàng, người bán có thể dễ dàng quản lý các đơn hàng của mình, nhưng vẫn đảm bảo được tính thẩm mĩ của trang web.</a:t>
             </a:r>
             <a:endParaRPr lang="en-US" sz="1400" b="0" i="0">
               <a:solidFill>
                 <a:schemeClr val="bg1"/>
               </a:solidFill>
               <a:effectLst/>
-              <a:latin typeface="Times New Roman" panose="02020603050405020304" pitchFamily="18" charset="0"/>
-              <a:cs typeface="Times New Roman" panose="02020603050405020304" pitchFamily="18" charset="0"/>
-            </a:endParaRPr>
-          </a:p>
-          <a:p>
-            <a:endParaRPr lang="en-US" sz="1400" b="0" i="0">
-              <a:solidFill>
-                <a:schemeClr val="bg1"/>
-              </a:solidFill>
-              <a:effectLst/>
-              <a:latin typeface="Times New Roman" panose="02020603050405020304" pitchFamily="18" charset="0"/>
-              <a:cs typeface="Times New Roman" panose="02020603050405020304" pitchFamily="18" charset="0"/>
-            </a:endParaRPr>
-          </a:p>
-          <a:p>
-            <a:r>
-              <a:rPr lang="en-US" sz="1400" b="0" i="0">
-                <a:solidFill>
-                  <a:schemeClr val="bg1"/>
-                </a:solidFill>
-                <a:effectLst/>
-                <a:latin typeface="Times New Roman" panose="02020603050405020304" pitchFamily="18" charset="0"/>
-                <a:cs typeface="Times New Roman" panose="02020603050405020304" pitchFamily="18" charset="0"/>
-              </a:rPr>
-              <a:t>-</a:t>
-            </a:r>
-            <a:r>
-              <a:rPr lang="vi-VN" sz="1400" b="0" i="0">
-                <a:solidFill>
-                  <a:schemeClr val="bg1"/>
-                </a:solidFill>
-                <a:effectLst/>
-                <a:latin typeface="Times New Roman" panose="02020603050405020304" pitchFamily="18" charset="0"/>
-                <a:cs typeface="Times New Roman" panose="02020603050405020304" pitchFamily="18" charset="0"/>
-              </a:rPr>
-              <a:t>Hệ thống được thiết kế đơn giản, dễ dùng để người dùng có thể dễ dàng tiến hành đặt hàng, người bán có thể dễ dàng quản lý các đơn hàng của mình, nhưng vẫn đảm bảo được tính thẩm mĩ của trang web.</a:t>
-            </a:r>
-            <a:endParaRPr lang="vi-VN" sz="1400" b="0" i="0">
-              <a:solidFill>
-                <a:schemeClr val="bg1"/>
-              </a:solidFill>
-              <a:effectLst/>
-              <a:latin typeface="Times New Roman" panose="02020603050405020304" pitchFamily="18" charset="0"/>
-              <a:cs typeface="Times New Roman" panose="02020603050405020304" pitchFamily="18" charset="0"/>
+              <a:latin typeface="Calibri" panose="02020603050405020304" pitchFamily="18" charset="0"/>
+              <a:cs typeface="Calibri" panose="02020603050405020304" pitchFamily="18" charset="0"/>
             </a:endParaRPr>
           </a:p>
         </p:txBody>
@@ -6273,13 +6392,13 @@
   <p:clrMapOvr>
     <a:masterClrMapping/>
   </p:clrMapOvr>
-  <mc:AlternateContent xmlns:mc="http://schemas.openxmlformats.org/markup-compatibility/2006">
-    <mc:Choice xmlns:p14="http://schemas.microsoft.com/office/powerpoint/2010/main" Requires="p14">
+  <mc:AlternateContent xmlns:mc="http://schemas.openxmlformats.org/markup-compatibility/2006" xmlns:p14="http://schemas.microsoft.com/office/powerpoint/2010/main">
+    <mc:Choice Requires="p14">
       <p:transition p14:dur="250">
         <p:wipe/>
       </p:transition>
     </mc:Choice>
-    <mc:Fallback>
+    <mc:Fallback xmlns="">
       <p:transition>
         <p:wipe/>
       </p:transition>
@@ -6307,14 +6426,14 @@
       </p:grpSpPr>
       <p:pic>
         <p:nvPicPr>
-          <p:cNvPr id="16" name="Picture 15" descr="A black rectangle with white text&#10;&#10;AI-generated content may be incorrect."/>
+          <p:cNvPr id="16" name="Picture 15" descr="A black rectangle with white text  AI-generated content may be incorrect."/>
           <p:cNvPicPr>
             <a:picLocks noChangeAspect="1"/>
           </p:cNvPicPr>
           <p:nvPr/>
         </p:nvPicPr>
         <p:blipFill>
-          <a:blip r:embed="rId1"/>
+          <a:blip r:embed="rId3"/>
           <a:stretch>
             <a:fillRect/>
           </a:stretch>
@@ -6362,31 +6481,22 @@
                 <a:spcPts val="0"/>
               </a:spcAft>
               <a:buClr>
-                <a:srgbClr val="1155CC"/>
+                <a:schemeClr val="bg1"/>
               </a:buClr>
               <a:buSzPts val="2300"/>
             </a:pPr>
             <a:r>
-              <a:rPr lang="en-US" sz="2300" b="1">
+              <a:rPr lang="vi-VN" sz="2300" b="1">
                 <a:solidFill>
-                  <a:srgbClr val="1155CC"/>
+                  <a:schemeClr val="bg1"/>
                 </a:solidFill>
-                <a:latin typeface="Times New Roman" panose="02020603050405020304"/>
-                <a:ea typeface="Times New Roman" panose="02020603050405020304"/>
-                <a:cs typeface="Times New Roman" panose="02020603050405020304"/>
-                <a:sym typeface="Times New Roman" panose="02020603050405020304"/>
+                <a:latin typeface="Calibri" panose="02020603050405020304"/>
+                <a:ea typeface="Calibri" panose="02020603050405020304"/>
+                <a:cs typeface="Calibri" panose="02020603050405020304"/>
+                <a:sym typeface="Calibri" panose="02020603050405020304"/>
               </a:rPr>
               <a:t>IV. Phạm Vi Báo Cáo và Cơ Sở Lý Luận</a:t>
             </a:r>
-            <a:endParaRPr sz="2300" b="1">
-              <a:solidFill>
-                <a:srgbClr val="1155CC"/>
-              </a:solidFill>
-              <a:latin typeface="Times New Roman" panose="02020603050405020304"/>
-              <a:ea typeface="Times New Roman" panose="02020603050405020304"/>
-              <a:cs typeface="Times New Roman" panose="02020603050405020304"/>
-              <a:sym typeface="Times New Roman" panose="02020603050405020304"/>
-            </a:endParaRPr>
           </a:p>
         </p:txBody>
       </p:sp>
@@ -6399,7 +6509,7 @@
         <p:spPr>
           <a:xfrm>
             <a:off x="1270572" y="1416156"/>
-            <a:ext cx="6631259" cy="3477875"/>
+            <a:ext cx="6631259" cy="2800767"/>
           </a:xfrm>
           <a:prstGeom prst="rect">
             <a:avLst/>
@@ -6417,205 +6527,135 @@
               <a:buChar char="-"/>
             </a:pPr>
             <a:r>
-              <a:rPr lang="en-US" sz="2000">
+              <a:rPr lang="en-US" sz="1600">
                 <a:solidFill>
                   <a:schemeClr val="bg1"/>
                 </a:solidFill>
                 <a:latin typeface="+mj-lt"/>
-                <a:cs typeface="Times New Roman" panose="02020603050405020304" pitchFamily="18" charset="0"/>
+                <a:cs typeface="Calibri" panose="02020603050405020304" pitchFamily="18" charset="0"/>
               </a:rPr>
               <a:t>Dùng những kiến thức đã được học ở trên lớp :</a:t>
             </a:r>
-            <a:endParaRPr lang="en-US" sz="2000">
+          </a:p>
+          <a:p>
+            <a:r>
+              <a:rPr lang="en-US" sz="1600">
+                <a:solidFill>
+                  <a:schemeClr val="bg1"/>
+                </a:solidFill>
+                <a:latin typeface="+mj-lt"/>
+                <a:cs typeface="Calibri" panose="02020603050405020304" pitchFamily="18" charset="0"/>
+              </a:rPr>
+              <a:t>	+HTML (Cấu Trúc)</a:t>
+            </a:r>
+          </a:p>
+          <a:p>
+            <a:r>
+              <a:rPr lang="en-US" sz="1600">
+                <a:solidFill>
+                  <a:schemeClr val="bg1"/>
+                </a:solidFill>
+                <a:latin typeface="+mj-lt"/>
+                <a:cs typeface="Calibri" panose="02020603050405020304" pitchFamily="18" charset="0"/>
+              </a:rPr>
+              <a:t>	+CSS (Định Dạng và Layout)</a:t>
+            </a:r>
+          </a:p>
+          <a:p>
+            <a:r>
+              <a:rPr lang="en-US" sz="1600">
+                <a:solidFill>
+                  <a:schemeClr val="bg1"/>
+                </a:solidFill>
+                <a:latin typeface="+mj-lt"/>
+                <a:cs typeface="Calibri" panose="02020603050405020304" pitchFamily="18" charset="0"/>
+              </a:rPr>
+              <a:t>	+JavaScript (Xử lý sự kiện cơ bản)</a:t>
+            </a:r>
+          </a:p>
+          <a:p>
+            <a:pPr marL="342900" indent="-342900">
+              <a:buFontTx/>
+              <a:buChar char="-"/>
+            </a:pPr>
+            <a:r>
+              <a:rPr lang="en-US" sz="1600">
+                <a:solidFill>
+                  <a:schemeClr val="bg1"/>
+                </a:solidFill>
+                <a:latin typeface="+mj-lt"/>
+                <a:cs typeface="Calibri" panose="02020603050405020304" pitchFamily="18" charset="0"/>
+              </a:rPr>
+              <a:t>Tính năng trang web:</a:t>
+            </a:r>
+          </a:p>
+          <a:p>
+            <a:r>
+              <a:rPr lang="en-US" sz="1600">
+                <a:solidFill>
+                  <a:schemeClr val="bg1"/>
+                </a:solidFill>
+                <a:latin typeface="+mj-lt"/>
+                <a:cs typeface="Calibri" panose="02020603050405020304" pitchFamily="18" charset="0"/>
+              </a:rPr>
+              <a:t>	+Trang chủ (Trưng bày sản phẩm nổi bật)</a:t>
+            </a:r>
+          </a:p>
+          <a:p>
+            <a:r>
+              <a:rPr lang="en-US" sz="1600">
+                <a:solidFill>
+                  <a:schemeClr val="bg1"/>
+                </a:solidFill>
+                <a:latin typeface="+mj-lt"/>
+                <a:cs typeface="Calibri" panose="02020603050405020304" pitchFamily="18" charset="0"/>
+              </a:rPr>
+              <a:t>	+Danh mục sản phẩm (Bộ lọc theo loại sản phẩm)</a:t>
+            </a:r>
+          </a:p>
+          <a:p>
+            <a:r>
+              <a:rPr lang="en-US" sz="1600">
+                <a:solidFill>
+                  <a:schemeClr val="bg1"/>
+                </a:solidFill>
+                <a:latin typeface="+mj-lt"/>
+                <a:cs typeface="Calibri" panose="02020603050405020304" pitchFamily="18" charset="0"/>
+              </a:rPr>
+              <a:t>	+Chi tiết sản phẩm (Mô tả, thông số kỹ thuật, giá cả)</a:t>
+            </a:r>
+          </a:p>
+          <a:p>
+            <a:r>
+              <a:rPr lang="en-US" sz="1600">
+                <a:solidFill>
+                  <a:schemeClr val="bg1"/>
+                </a:solidFill>
+                <a:latin typeface="+mj-lt"/>
+                <a:cs typeface="Calibri" panose="02020603050405020304" pitchFamily="18" charset="0"/>
+              </a:rPr>
+              <a:t>	+Giỏ hang và thanh toán</a:t>
+            </a:r>
+          </a:p>
+          <a:p>
+            <a:r>
+              <a:rPr lang="en-US" sz="1600">
+                <a:solidFill>
+                  <a:schemeClr val="bg1"/>
+                </a:solidFill>
+                <a:latin typeface="+mj-lt"/>
+                <a:cs typeface="Calibri" panose="02020603050405020304" pitchFamily="18" charset="0"/>
+              </a:rPr>
+              <a:t>	+Tương thích được trên cả mobile và desktop</a:t>
+            </a:r>
+          </a:p>
+          <a:p>
+            <a:endParaRPr lang="en-US" sz="1600">
               <a:solidFill>
                 <a:schemeClr val="bg1"/>
               </a:solidFill>
               <a:latin typeface="+mj-lt"/>
-              <a:cs typeface="Times New Roman" panose="02020603050405020304" pitchFamily="18" charset="0"/>
-            </a:endParaRPr>
-          </a:p>
-          <a:p>
-            <a:r>
-              <a:rPr lang="en-US" sz="2000">
-                <a:solidFill>
-                  <a:schemeClr val="bg1"/>
-                </a:solidFill>
-                <a:latin typeface="+mj-lt"/>
-                <a:cs typeface="Times New Roman" panose="02020603050405020304" pitchFamily="18" charset="0"/>
-              </a:rPr>
-              <a:t>	+HTML (Cấu Trúc)</a:t>
-            </a:r>
-            <a:endParaRPr lang="en-US" sz="2000">
-              <a:solidFill>
-                <a:schemeClr val="bg1"/>
-              </a:solidFill>
-              <a:latin typeface="+mj-lt"/>
-              <a:cs typeface="Times New Roman" panose="02020603050405020304" pitchFamily="18" charset="0"/>
-            </a:endParaRPr>
-          </a:p>
-          <a:p>
-            <a:r>
-              <a:rPr lang="en-US" sz="2000">
-                <a:solidFill>
-                  <a:schemeClr val="bg1"/>
-                </a:solidFill>
-                <a:latin typeface="+mj-lt"/>
-                <a:cs typeface="Times New Roman" panose="02020603050405020304" pitchFamily="18" charset="0"/>
-              </a:rPr>
-              <a:t>	+CSS (Định Dạng và Layout)</a:t>
-            </a:r>
-            <a:endParaRPr lang="en-US" sz="2000">
-              <a:solidFill>
-                <a:schemeClr val="bg1"/>
-              </a:solidFill>
-              <a:latin typeface="+mj-lt"/>
-              <a:cs typeface="Times New Roman" panose="02020603050405020304" pitchFamily="18" charset="0"/>
-            </a:endParaRPr>
-          </a:p>
-          <a:p>
-            <a:r>
-              <a:rPr lang="en-US" sz="2000">
-                <a:solidFill>
-                  <a:schemeClr val="bg1"/>
-                </a:solidFill>
-                <a:latin typeface="+mj-lt"/>
-                <a:cs typeface="Times New Roman" panose="02020603050405020304" pitchFamily="18" charset="0"/>
-              </a:rPr>
-              <a:t>	+JavaScript (Xử lý sự kiện cơ bản)</a:t>
-            </a:r>
-            <a:endParaRPr lang="en-US" sz="2000">
-              <a:solidFill>
-                <a:schemeClr val="bg1"/>
-              </a:solidFill>
-              <a:latin typeface="+mj-lt"/>
-              <a:cs typeface="Times New Roman" panose="02020603050405020304" pitchFamily="18" charset="0"/>
-            </a:endParaRPr>
-          </a:p>
-          <a:p>
-            <a:pPr marL="342900" indent="-342900">
-              <a:buFontTx/>
-              <a:buChar char="-"/>
-            </a:pPr>
-            <a:r>
-              <a:rPr lang="en-US" sz="2000">
-                <a:solidFill>
-                  <a:schemeClr val="bg1"/>
-                </a:solidFill>
-                <a:latin typeface="+mj-lt"/>
-                <a:cs typeface="Times New Roman" panose="02020603050405020304" pitchFamily="18" charset="0"/>
-              </a:rPr>
-              <a:t>Tính năng trang web:</a:t>
-            </a:r>
-            <a:endParaRPr lang="en-US" sz="2000">
-              <a:solidFill>
-                <a:schemeClr val="bg1"/>
-              </a:solidFill>
-              <a:latin typeface="+mj-lt"/>
-              <a:cs typeface="Times New Roman" panose="02020603050405020304" pitchFamily="18" charset="0"/>
-            </a:endParaRPr>
-          </a:p>
-          <a:p>
-            <a:r>
-              <a:rPr lang="en-US" sz="2000">
-                <a:solidFill>
-                  <a:schemeClr val="bg1"/>
-                </a:solidFill>
-                <a:latin typeface="+mj-lt"/>
-                <a:cs typeface="Times New Roman" panose="02020603050405020304" pitchFamily="18" charset="0"/>
-              </a:rPr>
-              <a:t>	+Trang chủ (Trưng bày sản phẩm nổi bật)</a:t>
-            </a:r>
-            <a:endParaRPr lang="en-US" sz="2000">
-              <a:solidFill>
-                <a:schemeClr val="bg1"/>
-              </a:solidFill>
-              <a:latin typeface="+mj-lt"/>
-              <a:cs typeface="Times New Roman" panose="02020603050405020304" pitchFamily="18" charset="0"/>
-            </a:endParaRPr>
-          </a:p>
-          <a:p>
-            <a:r>
-              <a:rPr lang="en-US" sz="2000">
-                <a:solidFill>
-                  <a:schemeClr val="bg1"/>
-                </a:solidFill>
-                <a:latin typeface="+mj-lt"/>
-                <a:cs typeface="Times New Roman" panose="02020603050405020304" pitchFamily="18" charset="0"/>
-              </a:rPr>
-              <a:t>	+Danh mục sản phẩm (Bộ lọc theo loại sản phẩm)</a:t>
-            </a:r>
-            <a:endParaRPr lang="en-US" sz="2000">
-              <a:solidFill>
-                <a:schemeClr val="bg1"/>
-              </a:solidFill>
-              <a:latin typeface="+mj-lt"/>
-              <a:cs typeface="Times New Roman" panose="02020603050405020304" pitchFamily="18" charset="0"/>
-            </a:endParaRPr>
-          </a:p>
-          <a:p>
-            <a:r>
-              <a:rPr lang="en-US" sz="2000">
-                <a:solidFill>
-                  <a:schemeClr val="bg1"/>
-                </a:solidFill>
-                <a:latin typeface="+mj-lt"/>
-                <a:cs typeface="Times New Roman" panose="02020603050405020304" pitchFamily="18" charset="0"/>
-              </a:rPr>
-              <a:t>	+Chi tiết sản phẩm (Mô tả, thông số kỹ thuật, giá cả)</a:t>
-            </a:r>
-            <a:endParaRPr lang="en-US" sz="2000">
-              <a:solidFill>
-                <a:schemeClr val="bg1"/>
-              </a:solidFill>
-              <a:latin typeface="+mj-lt"/>
-              <a:cs typeface="Times New Roman" panose="02020603050405020304" pitchFamily="18" charset="0"/>
-            </a:endParaRPr>
-          </a:p>
-          <a:p>
-            <a:r>
-              <a:rPr lang="en-US" sz="2000">
-                <a:solidFill>
-                  <a:schemeClr val="bg1"/>
-                </a:solidFill>
-                <a:latin typeface="+mj-lt"/>
-                <a:cs typeface="Times New Roman" panose="02020603050405020304" pitchFamily="18" charset="0"/>
-              </a:rPr>
-              <a:t>	+Giỏ hang và thanh toán</a:t>
-            </a:r>
-            <a:endParaRPr lang="en-US" sz="2000">
-              <a:solidFill>
-                <a:schemeClr val="bg1"/>
-              </a:solidFill>
-              <a:latin typeface="+mj-lt"/>
-              <a:cs typeface="Times New Roman" panose="02020603050405020304" pitchFamily="18" charset="0"/>
-            </a:endParaRPr>
-          </a:p>
-          <a:p>
-            <a:r>
-              <a:rPr lang="en-US" sz="2000">
-                <a:solidFill>
-                  <a:schemeClr val="bg1"/>
-                </a:solidFill>
-                <a:latin typeface="+mj-lt"/>
-                <a:cs typeface="Times New Roman" panose="02020603050405020304" pitchFamily="18" charset="0"/>
-              </a:rPr>
-              <a:t>	+Tương thích được trên cả mobile và desktop</a:t>
-            </a:r>
-            <a:endParaRPr lang="en-US" sz="2000">
-              <a:solidFill>
-                <a:schemeClr val="bg1"/>
-              </a:solidFill>
-              <a:latin typeface="+mj-lt"/>
-              <a:cs typeface="Times New Roman" panose="02020603050405020304" pitchFamily="18" charset="0"/>
-            </a:endParaRPr>
-          </a:p>
-          <a:p>
-            <a:endParaRPr lang="en-US" sz="2000">
-              <a:solidFill>
-                <a:schemeClr val="bg1"/>
-              </a:solidFill>
-              <a:latin typeface="+mj-lt"/>
-              <a:cs typeface="Times New Roman" panose="02020603050405020304" pitchFamily="18" charset="0"/>
+              <a:cs typeface="Calibri" panose="02020603050405020304" pitchFamily="18" charset="0"/>
             </a:endParaRPr>
           </a:p>
         </p:txBody>
@@ -6625,13 +6665,13 @@
   <p:clrMapOvr>
     <a:masterClrMapping/>
   </p:clrMapOvr>
-  <mc:AlternateContent xmlns:mc="http://schemas.openxmlformats.org/markup-compatibility/2006">
-    <mc:Choice xmlns:p14="http://schemas.microsoft.com/office/powerpoint/2010/main" Requires="p14">
+  <mc:AlternateContent xmlns:mc="http://schemas.openxmlformats.org/markup-compatibility/2006" xmlns:p14="http://schemas.microsoft.com/office/powerpoint/2010/main">
+    <mc:Choice Requires="p14">
       <p:transition p14:dur="250">
         <p:wipe/>
       </p:transition>
     </mc:Choice>
-    <mc:Fallback>
+    <mc:Fallback xmlns="">
       <p:transition>
         <p:wipe/>
       </p:transition>
@@ -6659,14 +6699,14 @@
       </p:grpSpPr>
       <p:pic>
         <p:nvPicPr>
-          <p:cNvPr id="16" name="Picture 15" descr="A black rectangle with white text&#10;&#10;AI-generated content may be incorrect."/>
+          <p:cNvPr id="16" name="Picture 15" descr="A black rectangle with white text  AI-generated content may be incorrect."/>
           <p:cNvPicPr>
             <a:picLocks noChangeAspect="1"/>
           </p:cNvPicPr>
           <p:nvPr/>
         </p:nvPicPr>
         <p:blipFill>
-          <a:blip r:embed="rId1"/>
+          <a:blip r:embed="rId3"/>
           <a:stretch>
             <a:fillRect/>
           </a:stretch>
@@ -6714,31 +6754,22 @@
                 <a:spcPts val="0"/>
               </a:spcAft>
               <a:buClr>
-                <a:srgbClr val="1155CC"/>
+                <a:schemeClr val="bg1"/>
               </a:buClr>
               <a:buSzPts val="2300"/>
             </a:pPr>
             <a:r>
               <a:rPr lang="en-US" sz="2300" b="1">
                 <a:solidFill>
-                  <a:srgbClr val="1155CC"/>
+                  <a:schemeClr val="bg1"/>
                 </a:solidFill>
-                <a:latin typeface="Times New Roman" panose="02020603050405020304"/>
-                <a:ea typeface="Times New Roman" panose="02020603050405020304"/>
-                <a:cs typeface="Times New Roman" panose="02020603050405020304"/>
-                <a:sym typeface="Times New Roman" panose="02020603050405020304"/>
+                <a:latin typeface="Calibri" panose="02020603050405020304"/>
+                <a:ea typeface="Calibri" panose="02020603050405020304"/>
+                <a:cs typeface="Calibri" panose="02020603050405020304"/>
+                <a:sym typeface="Calibri" panose="02020603050405020304"/>
               </a:rPr>
               <a:t>V. Tổng quan sản phẩm :</a:t>
             </a:r>
-            <a:endParaRPr sz="2300" b="1">
-              <a:solidFill>
-                <a:srgbClr val="1155CC"/>
-              </a:solidFill>
-              <a:latin typeface="Times New Roman" panose="02020603050405020304"/>
-              <a:ea typeface="Times New Roman" panose="02020603050405020304"/>
-              <a:cs typeface="Times New Roman" panose="02020603050405020304"/>
-              <a:sym typeface="Times New Roman" panose="02020603050405020304"/>
-            </a:endParaRPr>
           </a:p>
         </p:txBody>
       </p:sp>
@@ -6751,7 +6782,7 @@
           <p:nvPr/>
         </p:nvPicPr>
         <p:blipFill>
-          <a:blip r:embed="rId2"/>
+          <a:blip r:embed="rId4"/>
           <a:stretch>
             <a:fillRect/>
           </a:stretch>
@@ -6775,7 +6806,7 @@
           <p:nvPr/>
         </p:nvPicPr>
         <p:blipFill>
-          <a:blip r:embed="rId3"/>
+          <a:blip r:embed="rId5"/>
           <a:stretch>
             <a:fillRect/>
           </a:stretch>
@@ -6793,7 +6824,7 @@
       <p:sp>
         <p:nvSpPr>
           <p:cNvPr id="9" name="Google Shape;141;p14">
-            <a:hlinkClick r:id="rId4"/>
+            <a:hlinkClick r:id="rId6"/>
           </p:cNvPr>
           <p:cNvSpPr txBox="1"/>
           <p:nvPr/>
@@ -6825,31 +6856,22 @@
                 <a:spcPts val="0"/>
               </a:spcAft>
               <a:buClr>
-                <a:srgbClr val="1155CC"/>
+                <a:schemeClr val="bg1"/>
               </a:buClr>
               <a:buSzPts val="2300"/>
             </a:pPr>
             <a:r>
               <a:rPr lang="en-US" sz="2300" b="1" u="sng">
                 <a:solidFill>
-                  <a:srgbClr val="1155CC"/>
+                  <a:schemeClr val="bg1"/>
                 </a:solidFill>
-                <a:latin typeface="Times New Roman" panose="02020603050405020304"/>
-                <a:ea typeface="Times New Roman" panose="02020603050405020304"/>
-                <a:cs typeface="Times New Roman" panose="02020603050405020304"/>
-                <a:sym typeface="Times New Roman" panose="02020603050405020304"/>
+                <a:latin typeface="Calibri" panose="02020603050405020304"/>
+                <a:ea typeface="Calibri" panose="02020603050405020304"/>
+                <a:cs typeface="Calibri" panose="02020603050405020304"/>
+                <a:sym typeface="Calibri" panose="02020603050405020304"/>
               </a:rPr>
-              <a:t>Sản phẩm chi tiết ở đây !!!</a:t>
-            </a:r>
-            <a:endParaRPr sz="2300" b="1" u="sng">
-              <a:solidFill>
-                <a:srgbClr val="1155CC"/>
-              </a:solidFill>
-              <a:latin typeface="Times New Roman" panose="02020603050405020304"/>
-              <a:ea typeface="Times New Roman" panose="02020603050405020304"/>
-              <a:cs typeface="Times New Roman" panose="02020603050405020304"/>
-              <a:sym typeface="Times New Roman" panose="02020603050405020304"/>
-            </a:endParaRPr>
+              <a:t>Xem chi tiết sản phẩm</a:t>
+            </a:r>
           </a:p>
         </p:txBody>
       </p:sp>
@@ -6858,13 +6880,13 @@
   <p:clrMapOvr>
     <a:masterClrMapping/>
   </p:clrMapOvr>
-  <mc:AlternateContent xmlns:mc="http://schemas.openxmlformats.org/markup-compatibility/2006">
-    <mc:Choice xmlns:p14="http://schemas.microsoft.com/office/powerpoint/2010/main" Requires="p14">
+  <mc:AlternateContent xmlns:mc="http://schemas.openxmlformats.org/markup-compatibility/2006" xmlns:p14="http://schemas.microsoft.com/office/powerpoint/2010/main">
+    <mc:Choice Requires="p14">
       <p:transition p14:dur="250">
         <p:wipe/>
       </p:transition>
     </mc:Choice>
-    <mc:Fallback>
+    <mc:Fallback xmlns="">
       <p:transition>
         <p:wipe/>
       </p:transition>
@@ -7145,6 +7167,7 @@
       </a:style>
     </a:lnDef>
   </a:objectDefaults>
+  <a:extraClrSchemeLst/>
   <a:extLst>
     <a:ext uri="{05A4C25C-085E-4340-85A3-A5531E510DB2}">
       <thm15:themeFamily xmlns:thm15="http://schemas.microsoft.com/office/thememl/2012/main" name="Office Theme" id="{62F939B6-93AF-4DB8-9C6B-D6C7DFDC589F}" vid="{4A3C46E8-61CC-4603-A589-7422A47A8E4A}"/>
@@ -7429,6 +7452,8 @@
       </a:bgFillStyleLst>
     </a:fmtScheme>
   </a:themeElements>
+  <a:objectDefaults/>
+  <a:extraClrSchemeLst/>
   <a:extLst>
     <a:ext uri="{05A4C25C-085E-4340-85A3-A5531E510DB2}">
       <thm15:themeFamily xmlns:thm15="http://schemas.microsoft.com/office/thememl/2012/main" name="Office Theme" id="{62F939B6-93AF-4DB8-9C6B-D6C7DFDC589F}" vid="{4A3C46E8-61CC-4603-A589-7422A47A8E4A}"/>
